--- a/relatorio_parcial_raic/Apresentacao_Oral_RAIC_2026_Pedro.pptx
+++ b/relatorio_parcial_raic/Apresentacao_Oral_RAIC_2026_Pedro.pptx
@@ -799,7 +799,7 @@
           <a:lstStyle/>
           <a:p>
             <a:r>
-              <a:t>"Esses dados também contam desigualdade. A proporção de domicílios com água inadequada é 16 vezes maior nos municípios do Norte do que nos do Sul da amostra. E aparece uma relação com o envelhecimento, que é o tema do nosso núcleo: os setores de renda mais alta têm mais idosos, e os de renda mais baixa, mais crianças. Isso acontece dentro das próprias cidades: em 50 dos 53 municípios em que deu para calcular, os que têm pelo menos 30 setores com dados completos, a relação vai nessa direção. Um cuidado: é uma relação entre áreas, não entre pessoas. Não dá para tirar conclusões sobre indivíduos a partir disso."</a:t>
+              <a:t>"E aqui aparece o tema do nosso núcleo, o envelhecimento. Nos setores de renda mais alta há, proporcionalmente, mais idosos. Nos de renda mais baixa, mais crianças. E isso não é só diferença entre cidades. Dos 53 municípios em que deu para calcular dentro da cidade, em 50 a relação vai nessa direção. [pausa] Um cuidado importante: é uma associação entre áreas, não entre pessoas. Não dá para tirar daí conclusão sobre um idoso em particular."</a:t>
             </a:r>
           </a:p>
         </p:txBody>
@@ -869,7 +869,7 @@
           <a:lstStyle/>
           <a:p>
             <a:r>
-              <a:t>"Voltando ao começo: eu queria um índice que enxergasse dentro da cidade. Antes de calcular, os dados me mostraram três coisas que mudam o cálculo. Os zeros e a assimetria pedem um tratamento antes de padronizar, e a padronização vai ser feita dentro de cada município, como em Belo Horizonte. O sigilo pede um tratamento próprio para os dados ausentes. E o lixo vai ser testado na análise fatorial, que [frase aprovada pela Amanda] e vai orientar o peso de cada variável. Depois vêm as faixas de vulnerabilidade e os mapas. [pausa] [DECORAR] O que eu levo até aqui é isto: com dados, cada decisão muda o resultado. Por isso, cada uma está justificada e registrada."</a:t>
+              <a:t>"Para fechar. Eu queria um índice que enxergasse dentro da cidade, e antes de calcular os dados me mostraram três coisas que mudam o cálculo. Os zeros pedem um tratamento antes de pôr tudo na mesma régua, e essa régua vai ser a de cada município, como em Belo Horizonte. O sigilo pede um tratamento próprio para os dados que faltam. E o lixo vai ser testado na análise fatorial, uma técnica que mostra quais variáveis medem a mesma coisa e ajuda a definir o peso de cada uma. [frase sobre a análise fatorial — A CONFIRMAR] Depois vêm as faixas de vulnerabilidade e os mapas. Uma limitação acompanha tudo: é um estudo ecológico, com dados de áreas, não de pessoas. [pausa] [DECORAR] O que eu levo até aqui é isto: com dados, cada decisão muda o resultado. Por isso, cada uma está justificada e registrada."</a:t>
             </a:r>
           </a:p>
         </p:txBody>
@@ -1149,7 +1149,7 @@
           <a:lstStyle/>
           <a:p>
             <a:r>
-              <a:t>Pergunta: "Dá para generalizar para a região?" — Não: o Norte tem 6 municípios; os contrastes descrevem a amostra.</a:t>
+              <a:t>Pergunta: "E as diferenças regionais? Dá para generalizar?" — A proporção média de domicílios com água inadequada por setor é 16 vezes maior nos municípios do Norte (0,323) que nos do Sul (0,020); esgoto 8×, pretos/pardos/indígenas 3×. Não dá para generalizar: o Norte tem 6 municípios, e os contrastes descrevem a amostra, não as regiões.</a:t>
             </a:r>
           </a:p>
         </p:txBody>
@@ -1219,7 +1219,7 @@
           <a:lstStyle/>
           <a:p>
             <a:r>
-              <a:t>Pergunta: "Por que tirar só esse setor?" — O valor é incoerente com o perfil do próprio setor, uma favela; os demais extremos ficaram.</a:t>
+              <a:t>Pergunta: "Por que tirar só esse setor?" — A renda média é 55,7 vezes a mediana do município, num setor de favela com 7% de analfabetismo: incoerente com o perfil do setor. Os demais extremos ficaram.</a:t>
             </a:r>
           </a:p>
         </p:txBody>
@@ -1289,7 +1289,7 @@
           <a:lstStyle/>
           <a:p>
             <a:r>
-              <a:t>Pergunta: "Por que 53, se são 70?" — A correlação dentro do município só é estável com pelo menos 30 setores completos; municípios pequenos ficam com poucos setores após o recorte urbano.</a:t>
+              <a:t>Pergunta: "Por que 53, se são 70?" — Para calcular a correlação dentro de cada município, adotei o mínimo de 30 setores com todos os dados; municípios pequenos ficam com poucos setores após o recorte urbano.</a:t>
             </a:r>
           </a:p>
         </p:txBody>
@@ -1429,7 +1429,7 @@
           <a:lstStyle/>
           <a:p>
             <a:r>
-              <a:t>"Boa tarde. Eu sou o Pedro, bolsista FAPEMIG aqui no René Rachou desde março, orientado pela professora Amanda Andrade. Vou falar de um índice de vulnerabilidade à saúde construído com o Censo de 2022."</a:t>
+              <a:t>"Boa tarde. Eu sou o Pedro, bolsista FAPEMIG aqui no René Rachou desde março, orientado pela professora Amanda Andrade. Vou falar de um índice de vulnerabilidade à saúde feito com o Censo de 2022."</a:t>
             </a:r>
           </a:p>
         </p:txBody>
@@ -1499,7 +1499,7 @@
           <a:lstStyle/>
           <a:p>
             <a:r>
-              <a:t>"Quando a gente olha um indicador de uma cidade, quase sempre olha uma média. Só que a média junta, no mesmo número, o bairro que tem esgoto e o que não tem. [pausa] Para enxergar essa diferença, o IBGE divide a cidade em setores censitários. Pensem num quarteirão, ou em poucos quarteirões: é a menor área com dados do Censo. Belo Horizonte usou isso em 2012 para criar um Índice de Vulnerabilidade à Saúde por setor, juntando saneamento e condição socioeconômica. O que ainda não existia era esse índice com o Censo de 2022, para várias cidades ao mesmo tempo."</a:t>
+              <a:t>"Pensem em duas ruas da mesma cidade: numa tem esgoto, na outra não. A média da cidade junta as duas num número só e esconde essa diferença. [pausa] É disso que trata a vulnerabilidade à saúde. São as condições do lugar onde a gente mora, como saneamento, renda e escolaridade, que deixam as pessoas mais expostas a adoecer. Para enxergar isso, o IBGE divide a cidade em setores censitários. Pensem num quarteirão, ou em poucos quarteirões. Em 2012, Belo Horizonte usou esses setores para criar um índice e achar as áreas com condições piores. Com o Censo de 2022, esse índice ainda não existia para as cidades que eu estudo."</a:t>
             </a:r>
           </a:p>
         </p:txBody>
@@ -1569,7 +1569,7 @@
           <a:lstStyle/>
           <a:p>
             <a:r>
-              <a:t>"O projeto da professora Amanda quer [ler o objetivo geral]. Dentro dele, eu tenho dois objetivos: construir esse índice e depois ver como ele se distribui no espaço, em mapas. O primeiro está em andamento; o segundo vem depois. Hoje eu vou mostrar três coisas: como montei a base, o que os dados me mostraram no caminho e por que isso muda o jeito de calcular o índice."</a:t>
+              <a:t>"O projeto da professora Amanda tem como objetivo [objetivo geral — A CONFIRMAR]. Dentro dele, eu tenho dois objetivos. O primeiro é construir esse índice, e está em andamento. O segundo é ver como ele se distribui no espaço, em mapas, e vem depois. Então hoje eu não vou mostrar o índice pronto. Vou mostrar a etapa que vem antes dele: o que o Censo de 2022 me obrigou a decidir, e como cada decisão muda o resultado."</a:t>
             </a:r>
           </a:p>
         </p:txBody>
@@ -1639,7 +1639,7 @@
           <a:lstStyle/>
           <a:p>
             <a:r>
-              <a:t>"Usei as mesmas sete variáveis do índice de Belo Horizonte, em duas dimensões. No saneamento: água, esgoto e lixo inadequados. Na parte socioeconômica: quantas pessoas moram por domicílio, analfabetismo, renda e a proporção de pessoas pretas, pardas e indígenas. Os municípios são os 70 do ELSI-Brasil, o Estudo Longitudinal da Saúde dos Idosos Brasileiros. Comecei com 109 mil setores. Tirei os que não têm moradores, os que o IBGE escondeu por sigilo e os rurais, porque o índice é urbano. Ficaram 104.108 setores, onde moram 52 milhões de pessoas."</a:t>
+              <a:t>"Usei as variáveis do índice de Belo Horizonte que existem no Censo de 2022, com algumas adaptações. São duas dimensões. No saneamento, água, esgoto e lixo inadequados. Na parte socioeconômica, quantas pessoas moram por domicílio, analfabetismo, renda e a proporção de pessoas pretas, pardas e indígenas. As cidades são as 70 do ELSI-Brasil, o estudo de envelhecimento feito aqui no René Rachou. Comecei com 109 mil setores. Tirei os que não têm moradores, os que o IBGE escondeu por sigilo e os rurais, porque o índice é urbano. Ficaram pouco mais de 104 mil setores, onde moram 52 milhões de pessoas. No total, os rurais são só 2% dos setores, mas em 29 municípios passam de 10%. Isso entra nas limitações."</a:t>
             </a:r>
           </a:p>
         </p:txBody>
@@ -1709,7 +1709,7 @@
           <a:lstStyle/>
           <a:p>
             <a:r>
-              <a:t>"Antes de olhar qualquer resultado, eu precisava saber se o meu código estava certo. Rodei as mesmas rotinas no Brasil inteiro, 468 mil setores, e comparei com o que o IBGE publica. A população bateu: 203.080.756 pessoas. O índice de envelhecimento deu 79,99; o do IBGE é 80. No caminho apareceram decisões. Um exemplo: um setor de favela em Belo Horizonte com renda média de 170 mil reais por mês. Não combina com o próprio setor, então eu o tirei da análise. [pausa] Foi aí que eu entendi a lição deste trabalho: cada decisão muda o resultado, então cada uma precisa ser justificada e registrada."</a:t>
+              <a:t>"Antes de olhar qualquer resultado, eu precisava saber se o meu código lia o Censo direito. Rodei as mesmas rotinas no Brasil inteiro e comparei com o que o IBGE publica. A população bateu até a última pessoa: 203 milhões. O índice de envelhecimento deu 79,99, e o do IBGE é 80. No caminho apareceram decisões. Uma delas foi um setor de favela em Belo Horizonte com renda média de 170 mil reais por mês, quase 56 vezes a mediana da cidade. Não combina com o próprio setor, então tirei esse setor da análise descritiva. [pausa] Aí caiu a ficha: cada decisão muda o resultado. Por isso cada uma precisa ser justificada e registrada."</a:t>
             </a:r>
           </a:p>
         </p:txBody>
@@ -1779,7 +1779,7 @@
           <a:lstStyle/>
           <a:p>
             <a:r>
-              <a:t>"A primeira coisa que os dados me mostraram: em 74% dos setores, nenhum domicílio foi registrado com água inadequada. No esgoto são 73%; no lixo, 63%. Para a cidade é uma boa notícia, mas para o método é um problema. Quando a maioria dos valores é zero e poucos setores concentram o problema, a média engana. A renda se comporta igual: a média fica 63% acima da mediana, puxada por poucos setores muito ricos. Se eu pusesse isso direto numa escala de zero a um, quase todos os setores ficariam espremidos num canto da escala. Isso precisa ser tratado antes de calcular o índice."</a:t>
+              <a:t>"Agora, o que os dados me mostraram. Primeiro: em 74% dos setores, nenhum domicílio foi registrado com água inadequada. No esgoto são 73%, e no lixo, 63%. Parte desses zeros vem do sigilo do IBGE. Para a cidade é uma boa notícia, mas para o método é um problema. Quando quase tudo é zero e poucos setores concentram o problema, a distribuição fica torta. A renda faz o mesmo: a média fica 63% acima da mediana, porque poucos setores muito ricos puxam a média para cima. O índice vai pôr todas as variáveis na mesma régua, de zero a um. Com tantos zeros, quase todos os setores ficariam espremidos num canto dessa régua. Isso precisa ser tratado antes do cálculo."</a:t>
             </a:r>
           </a:p>
         </p:txBody>
@@ -1849,7 +1849,7 @@
           <a:lstStyle/>
           <a:p>
             <a:r>
-              <a:t>"A segunda. Quando um setor tem pouquíssima gente numa categoria, o IBGE esconde o número para ninguém ser identificado. É o sigilo. No analfabetismo, ele escondeu o dado em 16% dos setores. E que setores são esses? [pausa] Onde o dado existe, a renda mediana é de 2.314 reais. Onde ele foi escondido, 6.093. Ou seja, o IBGE esconde justamente onde há poucos analfabetos, nos setores mais ricos. Se eu jogasse esses setores fora, a média de analfabetismo sairia maior do que é de verdade. O dado que falta não é aleatório; ele também informa."</a:t>
+              <a:t>"Segundo achado. Quando um setor tem pouquíssima gente numa categoria, o IBGE esconde o número, para ninguém ser identificado. É o sigilo. No analfabetismo, o dado sumiu em 16% dos setores. E que setores são esses? [pausa] Onde o dado existe, a renda mediana é de uns 2.300 reais. Onde ele sumiu, passa de 6 mil. O IBGE esconde justamente onde há poucos analfabetos, que são os setores mais ricos. Sem esses setores, a média que eu observo é 3,6%, e a real fica entre 3,1 e 3,6. O efeito é pequeno, mas mostra que esse dado não sumiu por acaso. Ele precisa de um tratamento próprio."</a:t>
             </a:r>
           </a:p>
         </p:txBody>
@@ -1919,7 +1919,7 @@
           <a:lstStyle/>
           <a:p>
             <a:r>
-              <a:t>"A terceira. Quando olhei como as variáveis se relacionam, três andam juntas: renda, cor/raça e analfabetismo, com correlações entre 0,63 e 0,79. Elas parecem medir a mesma coisa, que é a posição social do setor. Já o lixo quase não se relaciona com nada. A minha hipótese, que ainda vou testar: o Censo conta a caçamba como destino inadequado do lixo, e a caçamba pode ter mais a ver com o jeito de coletar da cidade do que com vulnerabilidade."</a:t>
+              <a:t>"Terceiro achado. Medi como as variáveis andam juntas, com uma correlação que vai de zero, quando não há relação, a um, quando duas variáveis ordenam os setores do mesmo jeito. Renda, cor/raça e analfabetismo ficam entre 0,63 e 0,79. É alto. As três parecem medir a mesma coisa: a posição social do setor. Já o lixo quase não se relaciona com nada. Tenho uma hipótese, que ainda vou testar. Seguindo o índice de 2012, eu conto a caçamba como destino inadequado do lixo. Só que a caçamba pode ter mais a ver com o jeito de coletar de cada cidade do que com vulnerabilidade."</a:t>
             </a:r>
           </a:p>
         </p:txBody>
@@ -3043,8 +3043,63 @@
         </p:nvSpPr>
         <p:spPr>
           <a:xfrm>
-            <a:off x="201600" y="846000"/>
-            <a:ext cx="11807999" cy="684000"/>
+            <a:off x="201600" y="792000"/>
+            <a:ext cx="7200000" cy="270000"/>
+          </a:xfrm>
+          <a:prstGeom prst="rect">
+            <a:avLst/>
+          </a:prstGeom>
+          <a:noFill/>
+          <a:ln>
+            <a:noFill/>
+          </a:ln>
+          <a:effectLst/>
+        </p:spPr>
+        <p:style>
+          <a:lnRef idx="1">
+            <a:schemeClr val="accent1"/>
+          </a:lnRef>
+          <a:fillRef idx="3">
+            <a:schemeClr val="accent1"/>
+          </a:fillRef>
+          <a:effectRef idx="2">
+            <a:schemeClr val="accent1"/>
+          </a:effectRef>
+          <a:fontRef idx="minor">
+            <a:schemeClr val="lt1"/>
+          </a:fontRef>
+        </p:style>
+        <p:txBody>
+          <a:bodyPr rtlCol="0" anchor="t" lIns="125999" rIns="125999" tIns="54000" bIns="54000" wrap="square"/>
+          <a:lstStyle/>
+          <a:p>
+            <a:pPr algn="l">
+              <a:spcAft>
+                <a:spcPts val="0"/>
+              </a:spcAft>
+            </a:pPr>
+            <a:r>
+              <a:rPr sz="1300" b="1">
+                <a:solidFill>
+                  <a:srgbClr val="3B848E"/>
+                </a:solidFill>
+                <a:latin typeface="Calibri"/>
+              </a:rPr>
+              <a:t>RESULTADOS</a:t>
+            </a:r>
+          </a:p>
+        </p:txBody>
+      </p:sp>
+      <p:sp>
+        <p:nvSpPr>
+          <p:cNvPr id="3" name="Rectangle 2"/>
+          <p:cNvSpPr/>
+          <p:nvPr/>
+        </p:nvSpPr>
+        <p:spPr>
+          <a:xfrm>
+            <a:off x="201600" y="1026000"/>
+            <a:ext cx="11807999" cy="612000"/>
           </a:xfrm>
           <a:prstGeom prst="rect">
             <a:avLst/>
@@ -3092,7 +3147,7 @@
       </p:sp>
       <p:pic>
         <p:nvPicPr>
-          <p:cNvPr id="3" name="Picture 2" descr="oral_correlacoes.png"/>
+          <p:cNvPr id="4" name="Picture 3" descr="oral_correlacoes.png"/>
           <p:cNvPicPr>
             <a:picLocks noChangeAspect="1"/>
           </p:cNvPicPr>
@@ -3116,14 +3171,14 @@
       </p:pic>
       <p:sp>
         <p:nvSpPr>
-          <p:cNvPr id="4" name="Rectangle 3"/>
+          <p:cNvPr id="5" name="Rectangle 4"/>
           <p:cNvSpPr/>
           <p:nvPr/>
         </p:nvSpPr>
         <p:spPr>
           <a:xfrm>
-            <a:off x="8568000" y="2015999"/>
-            <a:ext cx="3311999" cy="1512000"/>
+            <a:off x="8568000" y="1728000"/>
+            <a:ext cx="3311999" cy="1872000"/>
           </a:xfrm>
           <a:prstGeom prst="rect">
             <a:avLst/>
@@ -3160,86 +3215,13 @@
               </a:spcAft>
             </a:pPr>
             <a:r>
-              <a:rPr sz="1800" b="1">
+              <a:rPr sz="1900" b="1">
                 <a:solidFill>
                   <a:srgbClr val="3B848E"/>
                 </a:solidFill>
                 <a:latin typeface="Calibri"/>
               </a:rPr>
-              <a:t>Uma só dimensão?</a:t>
-            </a:r>
-          </a:p>
-          <a:p>
-            <a:pPr algn="l">
-              <a:spcAft>
-                <a:spcPts val="600"/>
-              </a:spcAft>
-            </a:pPr>
-            <a:r>
-              <a:rPr sz="1800" b="0">
-                <a:solidFill>
-                  <a:srgbClr val="1F2A33"/>
-                </a:solidFill>
-                <a:latin typeface="Calibri"/>
-              </a:rPr>
-              <a:t>As três parecem medir a mesma coisa: a posição social do setor.</a:t>
-            </a:r>
-          </a:p>
-        </p:txBody>
-      </p:sp>
-      <p:sp>
-        <p:nvSpPr>
-          <p:cNvPr id="5" name="Rectangle 4"/>
-          <p:cNvSpPr/>
-          <p:nvPr/>
-        </p:nvSpPr>
-        <p:spPr>
-          <a:xfrm>
-            <a:off x="8568000" y="3960000"/>
-            <a:ext cx="3311999" cy="2015999"/>
-          </a:xfrm>
-          <a:prstGeom prst="rect">
-            <a:avLst/>
-          </a:prstGeom>
-          <a:noFill/>
-          <a:ln w="19050">
-            <a:solidFill>
-              <a:srgbClr val="D8634E"/>
-            </a:solidFill>
-          </a:ln>
-          <a:effectLst/>
-        </p:spPr>
-        <p:style>
-          <a:lnRef idx="1">
-            <a:schemeClr val="accent1"/>
-          </a:lnRef>
-          <a:fillRef idx="3">
-            <a:schemeClr val="accent1"/>
-          </a:fillRef>
-          <a:effectRef idx="2">
-            <a:schemeClr val="accent1"/>
-          </a:effectRef>
-          <a:fontRef idx="minor">
-            <a:schemeClr val="lt1"/>
-          </a:fontRef>
-        </p:style>
-        <p:txBody>
-          <a:bodyPr rtlCol="0" anchor="t" lIns="125999" rIns="125999" tIns="54000" bIns="54000" wrap="square"/>
-          <a:lstStyle/>
-          <a:p>
-            <a:pPr algn="l">
-              <a:spcAft>
-                <a:spcPts val="600"/>
-              </a:spcAft>
-            </a:pPr>
-            <a:r>
-              <a:rPr sz="1800" b="1">
-                <a:solidFill>
-                  <a:srgbClr val="D8634E"/>
-                </a:solidFill>
-                <a:latin typeface="Calibri"/>
-              </a:rPr>
-              <a:t>Hipótese a testar</a:t>
+              <a:t>Como ler</a:t>
             </a:r>
           </a:p>
           <a:p>
@@ -3255,14 +3237,103 @@
                 </a:solidFill>
                 <a:latin typeface="Calibri"/>
               </a:rPr>
-              <a:t>O Censo conta a caçamba como destino inadequado; ela pode medir o jeito de coletar da cidade, não a vulnerabilidade.</a:t>
+              <a:t>Correlação: 0 = nenhuma relação; 1 = as duas ordenam os setores do mesmo jeito.</a:t>
             </a:r>
           </a:p>
+          <a:p>
+            <a:pPr algn="l">
+              <a:spcAft>
+                <a:spcPts val="600"/>
+              </a:spcAft>
+            </a:pPr>
+            <a:r>
+              <a:rPr sz="1700" b="1">
+                <a:solidFill>
+                  <a:srgbClr val="1F2A33"/>
+                </a:solidFill>
+                <a:latin typeface="Calibri"/>
+              </a:rPr>
+              <a:t>As três medem a posição social do setor.</a:t>
+            </a:r>
+          </a:p>
         </p:txBody>
       </p:sp>
       <p:sp>
         <p:nvSpPr>
           <p:cNvPr id="6" name="Rectangle 5"/>
+          <p:cNvSpPr/>
+          <p:nvPr/>
+        </p:nvSpPr>
+        <p:spPr>
+          <a:xfrm>
+            <a:off x="8568000" y="3816000"/>
+            <a:ext cx="3311999" cy="2304000"/>
+          </a:xfrm>
+          <a:prstGeom prst="rect">
+            <a:avLst/>
+          </a:prstGeom>
+          <a:noFill/>
+          <a:ln w="19050">
+            <a:solidFill>
+              <a:srgbClr val="D8634E"/>
+            </a:solidFill>
+          </a:ln>
+          <a:effectLst/>
+        </p:spPr>
+        <p:style>
+          <a:lnRef idx="1">
+            <a:schemeClr val="accent1"/>
+          </a:lnRef>
+          <a:fillRef idx="3">
+            <a:schemeClr val="accent1"/>
+          </a:fillRef>
+          <a:effectRef idx="2">
+            <a:schemeClr val="accent1"/>
+          </a:effectRef>
+          <a:fontRef idx="minor">
+            <a:schemeClr val="lt1"/>
+          </a:fontRef>
+        </p:style>
+        <p:txBody>
+          <a:bodyPr rtlCol="0" anchor="t" lIns="125999" rIns="125999" tIns="54000" bIns="54000" wrap="square"/>
+          <a:lstStyle/>
+          <a:p>
+            <a:pPr algn="l">
+              <a:spcAft>
+                <a:spcPts val="600"/>
+              </a:spcAft>
+            </a:pPr>
+            <a:r>
+              <a:rPr sz="1900" b="1">
+                <a:solidFill>
+                  <a:srgbClr val="D8634E"/>
+                </a:solidFill>
+                <a:latin typeface="Calibri"/>
+              </a:rPr>
+              <a:t>Hipótese a testar</a:t>
+            </a:r>
+          </a:p>
+          <a:p>
+            <a:pPr algn="l">
+              <a:spcAft>
+                <a:spcPts val="600"/>
+              </a:spcAft>
+            </a:pPr>
+            <a:r>
+              <a:rPr sz="1600" b="0">
+                <a:solidFill>
+                  <a:srgbClr val="1F2A33"/>
+                </a:solidFill>
+                <a:latin typeface="Calibri"/>
+              </a:rPr>
+              <a:t>Seguindo o IVS 2012, o projeto conta a caçamba como destino inadequado (o Censo só registra o destino). Ela pode refletir o jeito de coletar da cidade, não a vulnerabilidade.</a:t>
+            </a:r>
+          </a:p>
+        </p:txBody>
+      </p:sp>
+      <p:sp>
+        <p:nvSpPr>
+          <p:cNvPr id="7" name="Rectangle 6"/>
           <p:cNvSpPr/>
           <p:nvPr/>
         </p:nvSpPr>
@@ -3341,8 +3412,63 @@
         </p:nvSpPr>
         <p:spPr>
           <a:xfrm>
-            <a:off x="201600" y="846000"/>
-            <a:ext cx="11807999" cy="684000"/>
+            <a:off x="201600" y="792000"/>
+            <a:ext cx="7200000" cy="270000"/>
+          </a:xfrm>
+          <a:prstGeom prst="rect">
+            <a:avLst/>
+          </a:prstGeom>
+          <a:noFill/>
+          <a:ln>
+            <a:noFill/>
+          </a:ln>
+          <a:effectLst/>
+        </p:spPr>
+        <p:style>
+          <a:lnRef idx="1">
+            <a:schemeClr val="accent1"/>
+          </a:lnRef>
+          <a:fillRef idx="3">
+            <a:schemeClr val="accent1"/>
+          </a:fillRef>
+          <a:effectRef idx="2">
+            <a:schemeClr val="accent1"/>
+          </a:effectRef>
+          <a:fontRef idx="minor">
+            <a:schemeClr val="lt1"/>
+          </a:fontRef>
+        </p:style>
+        <p:txBody>
+          <a:bodyPr rtlCol="0" anchor="t" lIns="125999" rIns="125999" tIns="54000" bIns="54000" wrap="square"/>
+          <a:lstStyle/>
+          <a:p>
+            <a:pPr algn="l">
+              <a:spcAft>
+                <a:spcPts val="0"/>
+              </a:spcAft>
+            </a:pPr>
+            <a:r>
+              <a:rPr sz="1300" b="1">
+                <a:solidFill>
+                  <a:srgbClr val="3B848E"/>
+                </a:solidFill>
+                <a:latin typeface="Calibri"/>
+              </a:rPr>
+              <a:t>RESULTADOS</a:t>
+            </a:r>
+          </a:p>
+        </p:txBody>
+      </p:sp>
+      <p:sp>
+        <p:nvSpPr>
+          <p:cNvPr id="3" name="Rectangle 2"/>
+          <p:cNvSpPr/>
+          <p:nvPr/>
+        </p:nvSpPr>
+        <p:spPr>
+          <a:xfrm>
+            <a:off x="201600" y="1026000"/>
+            <a:ext cx="11807999" cy="612000"/>
           </a:xfrm>
           <a:prstGeom prst="rect">
             <a:avLst/>
@@ -3383,21 +3509,21 @@
                 </a:solidFill>
                 <a:latin typeface="Calibri"/>
               </a:rPr>
-              <a:t>A desigualdade aparece entre regiões e entre gerações</a:t>
+              <a:t>Dentro das cidades, renda mais alta anda junto com mais idosos</a:t>
             </a:r>
           </a:p>
         </p:txBody>
       </p:sp>
       <p:sp>
         <p:nvSpPr>
-          <p:cNvPr id="3" name="Rectangle 2"/>
+          <p:cNvPr id="4" name="Rectangle 3"/>
           <p:cNvSpPr/>
           <p:nvPr/>
         </p:nvSpPr>
         <p:spPr>
           <a:xfrm>
             <a:off x="324000" y="1728000"/>
-            <a:ext cx="5688000" cy="4104000"/>
+            <a:ext cx="6983999" cy="3960000"/>
           </a:xfrm>
           <a:prstGeom prst="rect">
             <a:avLst/>
@@ -3434,96 +3560,7 @@
               </a:spcAft>
             </a:pPr>
             <a:r>
-              <a:rPr sz="8000" b="1">
-                <a:solidFill>
-                  <a:srgbClr val="3B848E"/>
-                </a:solidFill>
-                <a:latin typeface="Calibri"/>
-              </a:rPr>
-              <a:t>16×</a:t>
-            </a:r>
-          </a:p>
-          <a:p>
-            <a:pPr algn="ctr">
-              <a:spcAft>
-                <a:spcPts val="1000"/>
-              </a:spcAft>
-            </a:pPr>
-            <a:r>
-              <a:rPr sz="2000" b="0">
-                <a:solidFill>
-                  <a:srgbClr val="1F2A33"/>
-                </a:solidFill>
-                <a:latin typeface="Calibri"/>
-              </a:rPr>
-              <a:t>mais domicílios com água inadequada nos municípios do Norte do que nos do Sul</a:t>
-            </a:r>
-          </a:p>
-          <a:p>
-            <a:pPr algn="ctr">
-              <a:spcAft>
-                <a:spcPts val="1000"/>
-              </a:spcAft>
-            </a:pPr>
-            <a:r>
-              <a:rPr sz="1400" b="0">
-                <a:solidFill>
-                  <a:srgbClr val="6B7780"/>
-                </a:solidFill>
-                <a:latin typeface="Calibri"/>
-              </a:rPr>
-              <a:t>média por setor: 0,323 × 0,020 · o Norte tem 6 municípios na amostra — descreve os municípios estudados, não a região</a:t>
-            </a:r>
-          </a:p>
-        </p:txBody>
-      </p:sp>
-      <p:sp>
-        <p:nvSpPr>
-          <p:cNvPr id="4" name="Rectangle 3"/>
-          <p:cNvSpPr/>
-          <p:nvPr/>
-        </p:nvSpPr>
-        <p:spPr>
-          <a:xfrm>
-            <a:off x="6156000" y="1728000"/>
-            <a:ext cx="5688000" cy="4104000"/>
-          </a:xfrm>
-          <a:prstGeom prst="rect">
-            <a:avLst/>
-          </a:prstGeom>
-          <a:solidFill>
-            <a:srgbClr val="E9F4F4"/>
-          </a:solidFill>
-          <a:ln>
-            <a:noFill/>
-          </a:ln>
-          <a:effectLst/>
-        </p:spPr>
-        <p:style>
-          <a:lnRef idx="1">
-            <a:schemeClr val="accent1"/>
-          </a:lnRef>
-          <a:fillRef idx="3">
-            <a:schemeClr val="accent1"/>
-          </a:fillRef>
-          <a:effectRef idx="2">
-            <a:schemeClr val="accent1"/>
-          </a:effectRef>
-          <a:fontRef idx="minor">
-            <a:schemeClr val="lt1"/>
-          </a:fontRef>
-        </p:style>
-        <p:txBody>
-          <a:bodyPr rtlCol="0" anchor="ctr" lIns="125999" rIns="125999" tIns="54000" bIns="54000" wrap="square"/>
-          <a:lstStyle/>
-          <a:p>
-            <a:pPr algn="ctr">
-              <a:spcAft>
-                <a:spcPts val="1000"/>
-              </a:spcAft>
-            </a:pPr>
-            <a:r>
-              <a:rPr sz="8000" b="1">
+              <a:rPr sz="8800" b="1">
                 <a:solidFill>
                   <a:srgbClr val="D8634E"/>
                 </a:solidFill>
@@ -3539,13 +3576,13 @@
               </a:spcAft>
             </a:pPr>
             <a:r>
-              <a:rPr sz="2000" b="0">
+              <a:rPr sz="2200" b="0">
                 <a:solidFill>
                   <a:srgbClr val="1F2A33"/>
                 </a:solidFill>
                 <a:latin typeface="Calibri"/>
               </a:rPr>
-              <a:t>municípios em que os setores de renda mais alta têm mais idosos — e os de renda mais baixa, mais crianças</a:t>
+              <a:t>municípios em que a proporção de idosos é maior nos setores de renda mais alta</a:t>
             </a:r>
           </a:p>
           <a:p>
@@ -3555,13 +3592,13 @@
               </a:spcAft>
             </a:pPr>
             <a:r>
-              <a:rPr sz="1400" b="0">
+              <a:rPr sz="1600" b="0">
                 <a:solidFill>
                   <a:srgbClr val="6B7780"/>
                 </a:solidFill>
                 <a:latin typeface="Calibri"/>
               </a:rPr>
-              <a:t>municípios com pelo menos 30 setores com dados completos</a:t>
+              <a:t>mediana municipal da correlação: −0,46</a:t>
             </a:r>
           </a:p>
         </p:txBody>
@@ -3574,8 +3611,145 @@
         </p:nvSpPr>
         <p:spPr>
           <a:xfrm>
-            <a:off x="324000" y="5940000"/>
-            <a:ext cx="11520000" cy="432000"/>
+            <a:off x="7523999" y="1728000"/>
+            <a:ext cx="4356000" cy="3960000"/>
+          </a:xfrm>
+          <a:prstGeom prst="rect">
+            <a:avLst/>
+          </a:prstGeom>
+          <a:noFill/>
+          <a:ln w="19050">
+            <a:solidFill>
+              <a:srgbClr val="79BCC4"/>
+            </a:solidFill>
+          </a:ln>
+          <a:effectLst/>
+        </p:spPr>
+        <p:style>
+          <a:lnRef idx="1">
+            <a:schemeClr val="accent1"/>
+          </a:lnRef>
+          <a:fillRef idx="3">
+            <a:schemeClr val="accent1"/>
+          </a:fillRef>
+          <a:effectRef idx="2">
+            <a:schemeClr val="accent1"/>
+          </a:effectRef>
+          <a:fontRef idx="minor">
+            <a:schemeClr val="lt1"/>
+          </a:fontRef>
+        </p:style>
+        <p:txBody>
+          <a:bodyPr rtlCol="0" anchor="ctr" lIns="125999" rIns="125999" tIns="54000" bIns="54000" wrap="square"/>
+          <a:lstStyle/>
+          <a:p>
+            <a:pPr algn="ctr">
+              <a:spcAft>
+                <a:spcPts val="400"/>
+              </a:spcAft>
+            </a:pPr>
+            <a:r>
+              <a:rPr sz="1900" b="1">
+                <a:solidFill>
+                  <a:srgbClr val="3B848E"/>
+                </a:solidFill>
+                <a:latin typeface="Calibri"/>
+              </a:rPr>
+              <a:t>No conjunto dos setores</a:t>
+            </a:r>
+          </a:p>
+          <a:p>
+            <a:pPr algn="ctr">
+              <a:spcAft>
+                <a:spcPts val="400"/>
+              </a:spcAft>
+            </a:pPr>
+            <a:r>
+              <a:rPr sz="1800" b="0">
+                <a:solidFill>
+                  <a:srgbClr val="1F2A33"/>
+                </a:solidFill>
+                <a:latin typeface="Calibri"/>
+              </a:rPr>
+              <a:t>idosos × renda invertida</a:t>
+            </a:r>
+          </a:p>
+          <a:p>
+            <a:pPr algn="ctr">
+              <a:spcAft>
+                <a:spcPts val="400"/>
+              </a:spcAft>
+            </a:pPr>
+            <a:r>
+              <a:rPr sz="4000" b="1">
+                <a:solidFill>
+                  <a:srgbClr val="3B848E"/>
+                </a:solidFill>
+                <a:latin typeface="Calibri"/>
+              </a:rPr>
+              <a:t>−0,52</a:t>
+            </a:r>
+          </a:p>
+          <a:p>
+            <a:pPr algn="ctr">
+              <a:spcAft>
+                <a:spcPts val="400"/>
+              </a:spcAft>
+            </a:pPr>
+            <a:r>
+              <a:rPr sz="1800" b="0">
+                <a:solidFill>
+                  <a:srgbClr val="1F2A33"/>
+                </a:solidFill>
+                <a:latin typeface="Calibri"/>
+              </a:rPr>
+              <a:t>crianças × renda invertida</a:t>
+            </a:r>
+          </a:p>
+          <a:p>
+            <a:pPr algn="ctr">
+              <a:spcAft>
+                <a:spcPts val="400"/>
+              </a:spcAft>
+            </a:pPr>
+            <a:r>
+              <a:rPr sz="4000" b="1">
+                <a:solidFill>
+                  <a:srgbClr val="D8634E"/>
+                </a:solidFill>
+                <a:latin typeface="Calibri"/>
+              </a:rPr>
+              <a:t>+0,62</a:t>
+            </a:r>
+          </a:p>
+          <a:p>
+            <a:pPr algn="ctr">
+              <a:spcAft>
+                <a:spcPts val="400"/>
+              </a:spcAft>
+            </a:pPr>
+            <a:r>
+              <a:rPr sz="1600" b="0">
+                <a:solidFill>
+                  <a:srgbClr val="6B7780"/>
+                </a:solidFill>
+                <a:latin typeface="Calibri"/>
+              </a:rPr>
+              <a:t>mais idosos onde a renda é maior; mais crianças onde é menor</a:t>
+            </a:r>
+          </a:p>
+        </p:txBody>
+      </p:sp>
+      <p:sp>
+        <p:nvSpPr>
+          <p:cNvPr id="6" name="Rectangle 5"/>
+          <p:cNvSpPr/>
+          <p:nvPr/>
+        </p:nvSpPr>
+        <p:spPr>
+          <a:xfrm>
+            <a:off x="324000" y="5832000"/>
+            <a:ext cx="11520000" cy="576000"/>
           </a:xfrm>
           <a:prstGeom prst="rect">
             <a:avLst/>
@@ -3606,7 +3780,7 @@
           <a:p>
             <a:pPr algn="ctr">
               <a:spcAft>
-                <a:spcPts val="600"/>
+                <a:spcPts val="0"/>
               </a:spcAft>
             </a:pPr>
             <a:r>
@@ -3616,14 +3790,30 @@
                 </a:solidFill>
                 <a:latin typeface="Calibri"/>
               </a:rPr>
-              <a:t>Relação entre áreas, não entre pessoas.</a:t>
+              <a:t>Associação entre áreas, não entre pessoas.</a:t>
             </a:r>
           </a:p>
-        </p:txBody>
-      </p:sp>
-      <p:sp>
-        <p:nvSpPr>
-          <p:cNvPr id="6" name="Rectangle 5"/>
+          <a:p>
+            <a:pPr algn="ctr">
+              <a:spcAft>
+                <a:spcPts val="0"/>
+              </a:spcAft>
+            </a:pPr>
+            <a:r>
+              <a:rPr sz="1300" b="0">
+                <a:solidFill>
+                  <a:srgbClr val="6B7780"/>
+                </a:solidFill>
+                <a:latin typeface="Calibri"/>
+              </a:rPr>
+              <a:t>Municípios com pelo menos 30 setores com dados completos (53 dos 70). Spearman; renda invertida.</a:t>
+            </a:r>
+          </a:p>
+        </p:txBody>
+      </p:sp>
+      <p:sp>
+        <p:nvSpPr>
+          <p:cNvPr id="7" name="Rectangle 6"/>
           <p:cNvSpPr/>
           <p:nvPr/>
         </p:nvSpPr>
@@ -3702,8 +3892,63 @@
         </p:nvSpPr>
         <p:spPr>
           <a:xfrm>
-            <a:off x="201600" y="846000"/>
-            <a:ext cx="11807999" cy="684000"/>
+            <a:off x="201600" y="792000"/>
+            <a:ext cx="7200000" cy="270000"/>
+          </a:xfrm>
+          <a:prstGeom prst="rect">
+            <a:avLst/>
+          </a:prstGeom>
+          <a:noFill/>
+          <a:ln>
+            <a:noFill/>
+          </a:ln>
+          <a:effectLst/>
+        </p:spPr>
+        <p:style>
+          <a:lnRef idx="1">
+            <a:schemeClr val="accent1"/>
+          </a:lnRef>
+          <a:fillRef idx="3">
+            <a:schemeClr val="accent1"/>
+          </a:fillRef>
+          <a:effectRef idx="2">
+            <a:schemeClr val="accent1"/>
+          </a:effectRef>
+          <a:fontRef idx="minor">
+            <a:schemeClr val="lt1"/>
+          </a:fontRef>
+        </p:style>
+        <p:txBody>
+          <a:bodyPr rtlCol="0" anchor="t" lIns="125999" rIns="125999" tIns="54000" bIns="54000" wrap="square"/>
+          <a:lstStyle/>
+          <a:p>
+            <a:pPr algn="l">
+              <a:spcAft>
+                <a:spcPts val="0"/>
+              </a:spcAft>
+            </a:pPr>
+            <a:r>
+              <a:rPr sz="1300" b="1">
+                <a:solidFill>
+                  <a:srgbClr val="3B848E"/>
+                </a:solidFill>
+                <a:latin typeface="Calibri"/>
+              </a:rPr>
+              <a:t>CONCLUSÕES</a:t>
+            </a:r>
+          </a:p>
+        </p:txBody>
+      </p:sp>
+      <p:sp>
+        <p:nvSpPr>
+          <p:cNvPr id="3" name="Rectangle 2"/>
+          <p:cNvSpPr/>
+          <p:nvPr/>
+        </p:nvSpPr>
+        <p:spPr>
+          <a:xfrm>
+            <a:off x="201600" y="1026000"/>
+            <a:ext cx="11807999" cy="612000"/>
           </a:xfrm>
           <a:prstGeom prst="rect">
             <a:avLst/>
@@ -3744,21 +3989,21 @@
                 </a:solidFill>
                 <a:latin typeface="Calibri"/>
               </a:rPr>
-              <a:t>Três achados mudam como o índice será calculado</a:t>
+              <a:t>Conclusões e próximos passos</a:t>
             </a:r>
           </a:p>
         </p:txBody>
       </p:sp>
       <p:sp>
         <p:nvSpPr>
-          <p:cNvPr id="3" name="Rectangle 2"/>
+          <p:cNvPr id="4" name="Rectangle 3"/>
           <p:cNvSpPr/>
           <p:nvPr/>
         </p:nvSpPr>
         <p:spPr>
           <a:xfrm>
             <a:off x="324000" y="1655999"/>
-            <a:ext cx="4320000" cy="666000"/>
+            <a:ext cx="6696000" cy="3384000"/>
           </a:xfrm>
           <a:prstGeom prst="rect">
             <a:avLst/>
@@ -3786,6 +4031,136 @@
           </a:fontRef>
         </p:style>
         <p:txBody>
+          <a:bodyPr rtlCol="0" anchor="t" lIns="125999" rIns="125999" tIns="54000" bIns="54000" wrap="square"/>
+          <a:lstStyle/>
+          <a:p>
+            <a:pPr algn="l">
+              <a:spcAft>
+                <a:spcPts val="1000"/>
+              </a:spcAft>
+            </a:pPr>
+            <a:r>
+              <a:rPr sz="2100" b="1">
+                <a:solidFill>
+                  <a:srgbClr val="FFFFFF"/>
+                </a:solidFill>
+                <a:latin typeface="Calibri"/>
+              </a:rPr>
+              <a:t>Conclusões</a:t>
+            </a:r>
+          </a:p>
+          <a:p>
+            <a:pPr algn="l">
+              <a:spcAft>
+                <a:spcPts val="1000"/>
+              </a:spcAft>
+            </a:pPr>
+            <a:r>
+              <a:rPr sz="2000" b="1">
+                <a:solidFill>
+                  <a:srgbClr val="FFFFFF"/>
+                </a:solidFill>
+                <a:latin typeface="Calibri"/>
+              </a:rPr>
+              <a:t>1  </a:t>
+            </a:r>
+            <a:r>
+              <a:rPr sz="2000" b="0">
+                <a:solidFill>
+                  <a:srgbClr val="FFFFFF"/>
+                </a:solidFill>
+                <a:latin typeface="Calibri"/>
+              </a:rPr>
+              <a:t>Montar o IVS com o Censo 2022 exige decisões explícitas sobre zeros, sigilo e valores extremos.</a:t>
+            </a:r>
+          </a:p>
+          <a:p>
+            <a:pPr algn="l">
+              <a:spcAft>
+                <a:spcPts val="1000"/>
+              </a:spcAft>
+            </a:pPr>
+            <a:r>
+              <a:rPr sz="2000" b="1">
+                <a:solidFill>
+                  <a:srgbClr val="FFFFFF"/>
+                </a:solidFill>
+                <a:latin typeface="Calibri"/>
+              </a:rPr>
+              <a:t>2  </a:t>
+            </a:r>
+            <a:r>
+              <a:rPr sz="2000" b="0">
+                <a:solidFill>
+                  <a:srgbClr val="FFFFFF"/>
+                </a:solidFill>
+                <a:latin typeface="Calibri"/>
+              </a:rPr>
+              <a:t>O sigilo se concentra nos setores mais ricos e precisa de tratamento próprio.</a:t>
+            </a:r>
+          </a:p>
+          <a:p>
+            <a:pPr algn="l">
+              <a:spcAft>
+                <a:spcPts val="1000"/>
+              </a:spcAft>
+            </a:pPr>
+            <a:r>
+              <a:rPr sz="2000" b="1">
+                <a:solidFill>
+                  <a:srgbClr val="FFFFFF"/>
+                </a:solidFill>
+                <a:latin typeface="Calibri"/>
+              </a:rPr>
+              <a:t>3  </a:t>
+            </a:r>
+            <a:r>
+              <a:rPr sz="2000" b="0">
+                <a:solidFill>
+                  <a:srgbClr val="FFFFFF"/>
+                </a:solidFill>
+                <a:latin typeface="Calibri"/>
+              </a:rPr>
+              <a:t>O lixo se comporta à parte e será testado na análise fatorial.</a:t>
+            </a:r>
+          </a:p>
+        </p:txBody>
+      </p:sp>
+      <p:sp>
+        <p:nvSpPr>
+          <p:cNvPr id="5" name="Rectangle 4"/>
+          <p:cNvSpPr/>
+          <p:nvPr/>
+        </p:nvSpPr>
+        <p:spPr>
+          <a:xfrm>
+            <a:off x="7236000" y="1655999"/>
+            <a:ext cx="4608000" cy="432000"/>
+          </a:xfrm>
+          <a:prstGeom prst="rect">
+            <a:avLst/>
+          </a:prstGeom>
+          <a:noFill/>
+          <a:ln>
+            <a:noFill/>
+          </a:ln>
+          <a:effectLst/>
+        </p:spPr>
+        <p:style>
+          <a:lnRef idx="1">
+            <a:schemeClr val="accent1"/>
+          </a:lnRef>
+          <a:fillRef idx="3">
+            <a:schemeClr val="accent1"/>
+          </a:fillRef>
+          <a:effectRef idx="2">
+            <a:schemeClr val="accent1"/>
+          </a:effectRef>
+          <a:fontRef idx="minor">
+            <a:schemeClr val="lt1"/>
+          </a:fontRef>
+        </p:style>
+        <p:txBody>
           <a:bodyPr rtlCol="0" anchor="ctr" lIns="125999" rIns="125999" tIns="54000" bIns="54000" wrap="square"/>
           <a:lstStyle/>
           <a:p>
@@ -3795,512 +4170,7 @@
               </a:spcAft>
             </a:pPr>
             <a:r>
-              <a:rPr sz="1900" b="1">
-                <a:solidFill>
-                  <a:srgbClr val="FFFFFF"/>
-                </a:solidFill>
-                <a:latin typeface="Calibri"/>
-              </a:rPr>
-              <a:t>Muitos zeros e assimetria</a:t>
-            </a:r>
-          </a:p>
-        </p:txBody>
-      </p:sp>
-      <p:sp>
-        <p:nvSpPr>
-          <p:cNvPr id="4" name="Rectangle 3"/>
-          <p:cNvSpPr/>
-          <p:nvPr/>
-        </p:nvSpPr>
-        <p:spPr>
-          <a:xfrm>
-            <a:off x="4680000" y="1655999"/>
-            <a:ext cx="503999" cy="666000"/>
-          </a:xfrm>
-          <a:prstGeom prst="rect">
-            <a:avLst/>
-          </a:prstGeom>
-          <a:noFill/>
-          <a:ln>
-            <a:noFill/>
-          </a:ln>
-          <a:effectLst/>
-        </p:spPr>
-        <p:style>
-          <a:lnRef idx="1">
-            <a:schemeClr val="accent1"/>
-          </a:lnRef>
-          <a:fillRef idx="3">
-            <a:schemeClr val="accent1"/>
-          </a:fillRef>
-          <a:effectRef idx="2">
-            <a:schemeClr val="accent1"/>
-          </a:effectRef>
-          <a:fontRef idx="minor">
-            <a:schemeClr val="lt1"/>
-          </a:fontRef>
-        </p:style>
-        <p:txBody>
-          <a:bodyPr rtlCol="0" anchor="ctr" lIns="125999" rIns="125999" tIns="54000" bIns="54000" wrap="square"/>
-          <a:lstStyle/>
-          <a:p>
-            <a:pPr algn="ctr">
-              <a:spcAft>
-                <a:spcPts val="600"/>
-              </a:spcAft>
-            </a:pPr>
-            <a:r>
-              <a:rPr sz="2800" b="1">
-                <a:solidFill>
-                  <a:srgbClr val="E8813A"/>
-                </a:solidFill>
-                <a:latin typeface="Calibri"/>
-              </a:rPr>
-              <a:t>→</a:t>
-            </a:r>
-          </a:p>
-        </p:txBody>
-      </p:sp>
-      <p:sp>
-        <p:nvSpPr>
-          <p:cNvPr id="5" name="Rectangle 4"/>
-          <p:cNvSpPr/>
-          <p:nvPr/>
-        </p:nvSpPr>
-        <p:spPr>
-          <a:xfrm>
-            <a:off x="5220000" y="1655999"/>
-            <a:ext cx="6623999" cy="666000"/>
-          </a:xfrm>
-          <a:prstGeom prst="rect">
-            <a:avLst/>
-          </a:prstGeom>
-          <a:solidFill>
-            <a:srgbClr val="E9F4F4"/>
-          </a:solidFill>
-          <a:ln>
-            <a:noFill/>
-          </a:ln>
-          <a:effectLst/>
-        </p:spPr>
-        <p:style>
-          <a:lnRef idx="1">
-            <a:schemeClr val="accent1"/>
-          </a:lnRef>
-          <a:fillRef idx="3">
-            <a:schemeClr val="accent1"/>
-          </a:fillRef>
-          <a:effectRef idx="2">
-            <a:schemeClr val="accent1"/>
-          </a:effectRef>
-          <a:fontRef idx="minor">
-            <a:schemeClr val="lt1"/>
-          </a:fontRef>
-        </p:style>
-        <p:txBody>
-          <a:bodyPr rtlCol="0" anchor="ctr" lIns="125999" rIns="125999" tIns="54000" bIns="54000" wrap="square"/>
-          <a:lstStyle/>
-          <a:p>
-            <a:pPr algn="l">
-              <a:spcAft>
-                <a:spcPts val="600"/>
-              </a:spcAft>
-            </a:pPr>
-            <a:r>
-              <a:rPr sz="1900" b="0">
-                <a:solidFill>
-                  <a:srgbClr val="1F2A33"/>
-                </a:solidFill>
-                <a:latin typeface="Calibri"/>
-              </a:rPr>
-              <a:t>tratar antes de padronizar; padronizar dentro de cada município</a:t>
-            </a:r>
-          </a:p>
-        </p:txBody>
-      </p:sp>
-      <p:sp>
-        <p:nvSpPr>
-          <p:cNvPr id="6" name="Rectangle 5"/>
-          <p:cNvSpPr/>
-          <p:nvPr/>
-        </p:nvSpPr>
-        <p:spPr>
-          <a:xfrm>
-            <a:off x="324000" y="2430000"/>
-            <a:ext cx="4320000" cy="666000"/>
-          </a:xfrm>
-          <a:prstGeom prst="rect">
-            <a:avLst/>
-          </a:prstGeom>
-          <a:solidFill>
-            <a:srgbClr val="3B848E"/>
-          </a:solidFill>
-          <a:ln>
-            <a:noFill/>
-          </a:ln>
-          <a:effectLst/>
-        </p:spPr>
-        <p:style>
-          <a:lnRef idx="1">
-            <a:schemeClr val="accent1"/>
-          </a:lnRef>
-          <a:fillRef idx="3">
-            <a:schemeClr val="accent1"/>
-          </a:fillRef>
-          <a:effectRef idx="2">
-            <a:schemeClr val="accent1"/>
-          </a:effectRef>
-          <a:fontRef idx="minor">
-            <a:schemeClr val="lt1"/>
-          </a:fontRef>
-        </p:style>
-        <p:txBody>
-          <a:bodyPr rtlCol="0" anchor="ctr" lIns="125999" rIns="125999" tIns="54000" bIns="54000" wrap="square"/>
-          <a:lstStyle/>
-          <a:p>
-            <a:pPr algn="l">
-              <a:spcAft>
-                <a:spcPts val="600"/>
-              </a:spcAft>
-            </a:pPr>
-            <a:r>
-              <a:rPr sz="1900" b="1">
-                <a:solidFill>
-                  <a:srgbClr val="FFFFFF"/>
-                </a:solidFill>
-                <a:latin typeface="Calibri"/>
-              </a:rPr>
-              <a:t>Sigilo que não é aleatório</a:t>
-            </a:r>
-          </a:p>
-        </p:txBody>
-      </p:sp>
-      <p:sp>
-        <p:nvSpPr>
-          <p:cNvPr id="7" name="Rectangle 6"/>
-          <p:cNvSpPr/>
-          <p:nvPr/>
-        </p:nvSpPr>
-        <p:spPr>
-          <a:xfrm>
-            <a:off x="4680000" y="2430000"/>
-            <a:ext cx="503999" cy="666000"/>
-          </a:xfrm>
-          <a:prstGeom prst="rect">
-            <a:avLst/>
-          </a:prstGeom>
-          <a:noFill/>
-          <a:ln>
-            <a:noFill/>
-          </a:ln>
-          <a:effectLst/>
-        </p:spPr>
-        <p:style>
-          <a:lnRef idx="1">
-            <a:schemeClr val="accent1"/>
-          </a:lnRef>
-          <a:fillRef idx="3">
-            <a:schemeClr val="accent1"/>
-          </a:fillRef>
-          <a:effectRef idx="2">
-            <a:schemeClr val="accent1"/>
-          </a:effectRef>
-          <a:fontRef idx="minor">
-            <a:schemeClr val="lt1"/>
-          </a:fontRef>
-        </p:style>
-        <p:txBody>
-          <a:bodyPr rtlCol="0" anchor="ctr" lIns="125999" rIns="125999" tIns="54000" bIns="54000" wrap="square"/>
-          <a:lstStyle/>
-          <a:p>
-            <a:pPr algn="ctr">
-              <a:spcAft>
-                <a:spcPts val="600"/>
-              </a:spcAft>
-            </a:pPr>
-            <a:r>
-              <a:rPr sz="2800" b="1">
-                <a:solidFill>
-                  <a:srgbClr val="E8813A"/>
-                </a:solidFill>
-                <a:latin typeface="Calibri"/>
-              </a:rPr>
-              <a:t>→</a:t>
-            </a:r>
-          </a:p>
-        </p:txBody>
-      </p:sp>
-      <p:sp>
-        <p:nvSpPr>
-          <p:cNvPr id="8" name="Rectangle 7"/>
-          <p:cNvSpPr/>
-          <p:nvPr/>
-        </p:nvSpPr>
-        <p:spPr>
-          <a:xfrm>
-            <a:off x="5220000" y="2430000"/>
-            <a:ext cx="6623999" cy="666000"/>
-          </a:xfrm>
-          <a:prstGeom prst="rect">
-            <a:avLst/>
-          </a:prstGeom>
-          <a:solidFill>
-            <a:srgbClr val="E9F4F4"/>
-          </a:solidFill>
-          <a:ln>
-            <a:noFill/>
-          </a:ln>
-          <a:effectLst/>
-        </p:spPr>
-        <p:style>
-          <a:lnRef idx="1">
-            <a:schemeClr val="accent1"/>
-          </a:lnRef>
-          <a:fillRef idx="3">
-            <a:schemeClr val="accent1"/>
-          </a:fillRef>
-          <a:effectRef idx="2">
-            <a:schemeClr val="accent1"/>
-          </a:effectRef>
-          <a:fontRef idx="minor">
-            <a:schemeClr val="lt1"/>
-          </a:fontRef>
-        </p:style>
-        <p:txBody>
-          <a:bodyPr rtlCol="0" anchor="ctr" lIns="125999" rIns="125999" tIns="54000" bIns="54000" wrap="square"/>
-          <a:lstStyle/>
-          <a:p>
-            <a:pPr algn="l">
-              <a:spcAft>
-                <a:spcPts val="600"/>
-              </a:spcAft>
-            </a:pPr>
-            <a:r>
-              <a:rPr sz="1900" b="0">
-                <a:solidFill>
-                  <a:srgbClr val="1F2A33"/>
-                </a:solidFill>
-                <a:latin typeface="Calibri"/>
-              </a:rPr>
-              <a:t>tratamento próprio para os dados ausentes</a:t>
-            </a:r>
-          </a:p>
-        </p:txBody>
-      </p:sp>
-      <p:sp>
-        <p:nvSpPr>
-          <p:cNvPr id="9" name="Rectangle 8"/>
-          <p:cNvSpPr/>
-          <p:nvPr/>
-        </p:nvSpPr>
-        <p:spPr>
-          <a:xfrm>
-            <a:off x="324000" y="3203999"/>
-            <a:ext cx="4320000" cy="666000"/>
-          </a:xfrm>
-          <a:prstGeom prst="rect">
-            <a:avLst/>
-          </a:prstGeom>
-          <a:solidFill>
-            <a:srgbClr val="3B848E"/>
-          </a:solidFill>
-          <a:ln>
-            <a:noFill/>
-          </a:ln>
-          <a:effectLst/>
-        </p:spPr>
-        <p:style>
-          <a:lnRef idx="1">
-            <a:schemeClr val="accent1"/>
-          </a:lnRef>
-          <a:fillRef idx="3">
-            <a:schemeClr val="accent1"/>
-          </a:fillRef>
-          <a:effectRef idx="2">
-            <a:schemeClr val="accent1"/>
-          </a:effectRef>
-          <a:fontRef idx="minor">
-            <a:schemeClr val="lt1"/>
-          </a:fontRef>
-        </p:style>
-        <p:txBody>
-          <a:bodyPr rtlCol="0" anchor="ctr" lIns="125999" rIns="125999" tIns="54000" bIns="54000" wrap="square"/>
-          <a:lstStyle/>
-          <a:p>
-            <a:pPr algn="l">
-              <a:spcAft>
-                <a:spcPts val="600"/>
-              </a:spcAft>
-            </a:pPr>
-            <a:r>
-              <a:rPr sz="1900" b="1">
-                <a:solidFill>
-                  <a:srgbClr val="FFFFFF"/>
-                </a:solidFill>
-                <a:latin typeface="Calibri"/>
-              </a:rPr>
-              <a:t>Lixo que anda sozinho</a:t>
-            </a:r>
-          </a:p>
-        </p:txBody>
-      </p:sp>
-      <p:sp>
-        <p:nvSpPr>
-          <p:cNvPr id="10" name="Rectangle 9"/>
-          <p:cNvSpPr/>
-          <p:nvPr/>
-        </p:nvSpPr>
-        <p:spPr>
-          <a:xfrm>
-            <a:off x="4680000" y="3203999"/>
-            <a:ext cx="503999" cy="666000"/>
-          </a:xfrm>
-          <a:prstGeom prst="rect">
-            <a:avLst/>
-          </a:prstGeom>
-          <a:noFill/>
-          <a:ln>
-            <a:noFill/>
-          </a:ln>
-          <a:effectLst/>
-        </p:spPr>
-        <p:style>
-          <a:lnRef idx="1">
-            <a:schemeClr val="accent1"/>
-          </a:lnRef>
-          <a:fillRef idx="3">
-            <a:schemeClr val="accent1"/>
-          </a:fillRef>
-          <a:effectRef idx="2">
-            <a:schemeClr val="accent1"/>
-          </a:effectRef>
-          <a:fontRef idx="minor">
-            <a:schemeClr val="lt1"/>
-          </a:fontRef>
-        </p:style>
-        <p:txBody>
-          <a:bodyPr rtlCol="0" anchor="ctr" lIns="125999" rIns="125999" tIns="54000" bIns="54000" wrap="square"/>
-          <a:lstStyle/>
-          <a:p>
-            <a:pPr algn="ctr">
-              <a:spcAft>
-                <a:spcPts val="600"/>
-              </a:spcAft>
-            </a:pPr>
-            <a:r>
-              <a:rPr sz="2800" b="1">
-                <a:solidFill>
-                  <a:srgbClr val="E8813A"/>
-                </a:solidFill>
-                <a:latin typeface="Calibri"/>
-              </a:rPr>
-              <a:t>→</a:t>
-            </a:r>
-          </a:p>
-        </p:txBody>
-      </p:sp>
-      <p:sp>
-        <p:nvSpPr>
-          <p:cNvPr id="11" name="Rectangle 10"/>
-          <p:cNvSpPr/>
-          <p:nvPr/>
-        </p:nvSpPr>
-        <p:spPr>
-          <a:xfrm>
-            <a:off x="5220000" y="3203999"/>
-            <a:ext cx="6623999" cy="666000"/>
-          </a:xfrm>
-          <a:prstGeom prst="rect">
-            <a:avLst/>
-          </a:prstGeom>
-          <a:solidFill>
-            <a:srgbClr val="E9F4F4"/>
-          </a:solidFill>
-          <a:ln>
-            <a:noFill/>
-          </a:ln>
-          <a:effectLst/>
-        </p:spPr>
-        <p:style>
-          <a:lnRef idx="1">
-            <a:schemeClr val="accent1"/>
-          </a:lnRef>
-          <a:fillRef idx="3">
-            <a:schemeClr val="accent1"/>
-          </a:fillRef>
-          <a:effectRef idx="2">
-            <a:schemeClr val="accent1"/>
-          </a:effectRef>
-          <a:fontRef idx="minor">
-            <a:schemeClr val="lt1"/>
-          </a:fontRef>
-        </p:style>
-        <p:txBody>
-          <a:bodyPr rtlCol="0" anchor="ctr" lIns="125999" rIns="125999" tIns="54000" bIns="54000" wrap="square"/>
-          <a:lstStyle/>
-          <a:p>
-            <a:pPr algn="l">
-              <a:spcAft>
-                <a:spcPts val="600"/>
-              </a:spcAft>
-            </a:pPr>
-            <a:r>
-              <a:rPr sz="1900" b="0">
-                <a:solidFill>
-                  <a:srgbClr val="1F2A33"/>
-                </a:solidFill>
-                <a:latin typeface="Calibri"/>
-              </a:rPr>
-              <a:t>testar na análise fatorial</a:t>
-            </a:r>
-          </a:p>
-        </p:txBody>
-      </p:sp>
-      <p:sp>
-        <p:nvSpPr>
-          <p:cNvPr id="12" name="Rectangle 11"/>
-          <p:cNvSpPr/>
-          <p:nvPr/>
-        </p:nvSpPr>
-        <p:spPr>
-          <a:xfrm>
-            <a:off x="324000" y="4031999"/>
-            <a:ext cx="11520000" cy="324000"/>
-          </a:xfrm>
-          <a:prstGeom prst="rect">
-            <a:avLst/>
-          </a:prstGeom>
-          <a:noFill/>
-          <a:ln>
-            <a:noFill/>
-          </a:ln>
-          <a:effectLst/>
-        </p:spPr>
-        <p:style>
-          <a:lnRef idx="1">
-            <a:schemeClr val="accent1"/>
-          </a:lnRef>
-          <a:fillRef idx="3">
-            <a:schemeClr val="accent1"/>
-          </a:fillRef>
-          <a:effectRef idx="2">
-            <a:schemeClr val="accent1"/>
-          </a:effectRef>
-          <a:fontRef idx="minor">
-            <a:schemeClr val="lt1"/>
-          </a:fontRef>
-        </p:style>
-        <p:txBody>
-          <a:bodyPr rtlCol="0" anchor="t" lIns="125999" rIns="125999" tIns="54000" bIns="54000" wrap="square"/>
-          <a:lstStyle/>
-          <a:p>
-            <a:pPr algn="l">
-              <a:spcAft>
-                <a:spcPts val="600"/>
-              </a:spcAft>
-            </a:pPr>
-            <a:r>
-              <a:rPr sz="1900" b="1">
+              <a:rPr sz="2100" b="1">
                 <a:solidFill>
                   <a:srgbClr val="3B848E"/>
                 </a:solidFill>
@@ -4313,16 +4183,16 @@
       </p:sp>
       <p:sp>
         <p:nvSpPr>
-          <p:cNvPr id="13" name="Pentagon 12"/>
+          <p:cNvPr id="6" name="Rectangle 5"/>
           <p:cNvSpPr/>
           <p:nvPr/>
         </p:nvSpPr>
         <p:spPr>
           <a:xfrm>
-            <a:off x="324000" y="4392000"/>
-            <a:ext cx="2232000" cy="576000"/>
-          </a:xfrm>
-          <a:prstGeom prst="homePlate">
+            <a:off x="7236000" y="2124000"/>
+            <a:ext cx="4608000" cy="511200"/>
+          </a:xfrm>
+          <a:prstGeom prst="rect">
             <a:avLst/>
           </a:prstGeom>
           <a:solidFill>
@@ -4351,35 +4221,35 @@
           <a:bodyPr rtlCol="0" anchor="ctr" lIns="125999" rIns="125999" tIns="54000" bIns="54000" wrap="square"/>
           <a:lstStyle/>
           <a:p>
-            <a:pPr algn="ctr">
+            <a:pPr algn="l">
               <a:spcAft>
                 <a:spcPts val="600"/>
               </a:spcAft>
             </a:pPr>
             <a:r>
-              <a:rPr sz="1600" b="1">
+              <a:rPr sz="1800" b="1">
                 <a:solidFill>
                   <a:srgbClr val="1F2A33"/>
                 </a:solidFill>
                 <a:latin typeface="Calibri"/>
               </a:rPr>
-              <a:t>Análise fatorial</a:t>
+              <a:t>1  Análise fatorial</a:t>
             </a:r>
           </a:p>
         </p:txBody>
       </p:sp>
       <p:sp>
         <p:nvSpPr>
-          <p:cNvPr id="14" name="Chevron 13"/>
+          <p:cNvPr id="7" name="Rectangle 6"/>
           <p:cNvSpPr/>
           <p:nvPr/>
         </p:nvSpPr>
         <p:spPr>
           <a:xfrm>
-            <a:off x="2646000" y="4392000"/>
-            <a:ext cx="2232000" cy="576000"/>
-          </a:xfrm>
-          <a:prstGeom prst="chevron">
+            <a:off x="7236000" y="2707200"/>
+            <a:ext cx="4608000" cy="511200"/>
+          </a:xfrm>
+          <a:prstGeom prst="rect">
             <a:avLst/>
           </a:prstGeom>
           <a:solidFill>
@@ -4408,35 +4278,35 @@
           <a:bodyPr rtlCol="0" anchor="ctr" lIns="125999" rIns="125999" tIns="54000" bIns="54000" wrap="square"/>
           <a:lstStyle/>
           <a:p>
-            <a:pPr algn="ctr">
+            <a:pPr algn="l">
               <a:spcAft>
                 <a:spcPts val="600"/>
               </a:spcAft>
             </a:pPr>
             <a:r>
-              <a:rPr sz="1600" b="1">
+              <a:rPr sz="1800" b="1">
                 <a:solidFill>
                   <a:srgbClr val="1F2A33"/>
                 </a:solidFill>
                 <a:latin typeface="Calibri"/>
               </a:rPr>
-              <a:t>Pesos</a:t>
+              <a:t>2  Pesos das variáveis</a:t>
             </a:r>
           </a:p>
         </p:txBody>
       </p:sp>
       <p:sp>
         <p:nvSpPr>
-          <p:cNvPr id="15" name="Chevron 14"/>
+          <p:cNvPr id="8" name="Rectangle 7"/>
           <p:cNvSpPr/>
           <p:nvPr/>
         </p:nvSpPr>
         <p:spPr>
           <a:xfrm>
-            <a:off x="4968000" y="4392000"/>
-            <a:ext cx="2232000" cy="576000"/>
-          </a:xfrm>
-          <a:prstGeom prst="chevron">
+            <a:off x="7236000" y="3290400"/>
+            <a:ext cx="4608000" cy="511200"/>
+          </a:xfrm>
+          <a:prstGeom prst="rect">
             <a:avLst/>
           </a:prstGeom>
           <a:solidFill>
@@ -4465,35 +4335,35 @@
           <a:bodyPr rtlCol="0" anchor="ctr" lIns="125999" rIns="125999" tIns="54000" bIns="54000" wrap="square"/>
           <a:lstStyle/>
           <a:p>
-            <a:pPr algn="ctr">
+            <a:pPr algn="l">
               <a:spcAft>
                 <a:spcPts val="600"/>
               </a:spcAft>
             </a:pPr>
             <a:r>
-              <a:rPr sz="1600" b="1">
+              <a:rPr sz="1800" b="1">
                 <a:solidFill>
                   <a:srgbClr val="1F2A33"/>
                 </a:solidFill>
                 <a:latin typeface="Calibri"/>
               </a:rPr>
-              <a:t>Faixas de vulnerabilidade</a:t>
+              <a:t>3  Faixas de vulnerabilidade</a:t>
             </a:r>
           </a:p>
         </p:txBody>
       </p:sp>
       <p:sp>
         <p:nvSpPr>
-          <p:cNvPr id="16" name="Chevron 15"/>
+          <p:cNvPr id="9" name="Rectangle 8"/>
           <p:cNvSpPr/>
           <p:nvPr/>
         </p:nvSpPr>
         <p:spPr>
           <a:xfrm>
-            <a:off x="7290000" y="4392000"/>
-            <a:ext cx="2232000" cy="576000"/>
-          </a:xfrm>
-          <a:prstGeom prst="chevron">
+            <a:off x="7236000" y="3873600"/>
+            <a:ext cx="4608000" cy="511200"/>
+          </a:xfrm>
+          <a:prstGeom prst="rect">
             <a:avLst/>
           </a:prstGeom>
           <a:solidFill>
@@ -4522,35 +4392,35 @@
           <a:bodyPr rtlCol="0" anchor="ctr" lIns="125999" rIns="125999" tIns="54000" bIns="54000" wrap="square"/>
           <a:lstStyle/>
           <a:p>
-            <a:pPr algn="ctr">
+            <a:pPr algn="l">
               <a:spcAft>
                 <a:spcPts val="600"/>
               </a:spcAft>
             </a:pPr>
             <a:r>
-              <a:rPr sz="1600" b="1">
+              <a:rPr sz="1800" b="1">
                 <a:solidFill>
                   <a:srgbClr val="1F2A33"/>
                 </a:solidFill>
                 <a:latin typeface="Calibri"/>
               </a:rPr>
-              <a:t>Mapas no QGIS</a:t>
+              <a:t>4  Mapas no QGIS</a:t>
             </a:r>
           </a:p>
         </p:txBody>
       </p:sp>
       <p:sp>
         <p:nvSpPr>
-          <p:cNvPr id="17" name="Chevron 16"/>
+          <p:cNvPr id="10" name="Rectangle 9"/>
           <p:cNvSpPr/>
           <p:nvPr/>
         </p:nvSpPr>
         <p:spPr>
           <a:xfrm>
-            <a:off x="9612000" y="4392000"/>
-            <a:ext cx="2232000" cy="576000"/>
-          </a:xfrm>
-          <a:prstGeom prst="chevron">
+            <a:off x="7236000" y="4456800"/>
+            <a:ext cx="4608000" cy="511200"/>
+          </a:xfrm>
+          <a:prstGeom prst="rect">
             <a:avLst/>
           </a:prstGeom>
           <a:solidFill>
@@ -4579,77 +4449,77 @@
           <a:bodyPr rtlCol="0" anchor="ctr" lIns="125999" rIns="125999" tIns="54000" bIns="54000" wrap="square"/>
           <a:lstStyle/>
           <a:p>
-            <a:pPr algn="ctr">
-              <a:spcAft>
-                <a:spcPts val="600"/>
-              </a:spcAft>
-            </a:pPr>
-            <a:r>
-              <a:rPr sz="1600" b="1">
-                <a:solidFill>
-                  <a:srgbClr val="1F2A33"/>
-                </a:solidFill>
-                <a:latin typeface="Calibri"/>
-              </a:rPr>
-              <a:t>Artigo</a:t>
-            </a:r>
-          </a:p>
-        </p:txBody>
-      </p:sp>
-      <p:sp>
-        <p:nvSpPr>
-          <p:cNvPr id="18" name="Rectangle 17"/>
-          <p:cNvSpPr/>
-          <p:nvPr/>
-        </p:nvSpPr>
-        <p:spPr>
-          <a:xfrm>
-            <a:off x="324000" y="5040000"/>
-            <a:ext cx="11520000" cy="360000"/>
-          </a:xfrm>
-          <a:prstGeom prst="rect">
-            <a:avLst/>
-          </a:prstGeom>
-          <a:noFill/>
-          <a:ln>
-            <a:noFill/>
-          </a:ln>
-          <a:effectLst/>
-        </p:spPr>
-        <p:style>
-          <a:lnRef idx="1">
-            <a:schemeClr val="accent1"/>
-          </a:lnRef>
-          <a:fillRef idx="3">
-            <a:schemeClr val="accent1"/>
-          </a:fillRef>
-          <a:effectRef idx="2">
-            <a:schemeClr val="accent1"/>
-          </a:effectRef>
-          <a:fontRef idx="minor">
-            <a:schemeClr val="lt1"/>
-          </a:fontRef>
-        </p:style>
-        <p:txBody>
-          <a:bodyPr rtlCol="0" anchor="t" lIns="125999" rIns="125999" tIns="54000" bIns="54000" wrap="square"/>
-          <a:lstStyle/>
-          <a:p>
             <a:pPr algn="l">
               <a:spcAft>
                 <a:spcPts val="600"/>
               </a:spcAft>
             </a:pPr>
             <a:r>
-              <a:rPr sz="1600" b="1">
+              <a:rPr sz="1800" b="1">
                 <a:solidFill>
                   <a:srgbClr val="1F2A33"/>
                 </a:solidFill>
                 <a:latin typeface="Calibri"/>
               </a:rPr>
-              <a:t>Análise fatorial: </a:t>
+              <a:t>5  Artigo</a:t>
+            </a:r>
+          </a:p>
+        </p:txBody>
+      </p:sp>
+      <p:sp>
+        <p:nvSpPr>
+          <p:cNvPr id="11" name="Rectangle 10"/>
+          <p:cNvSpPr/>
+          <p:nvPr/>
+        </p:nvSpPr>
+        <p:spPr>
+          <a:xfrm>
+            <a:off x="7236000" y="5076000"/>
+            <a:ext cx="4608000" cy="468000"/>
+          </a:xfrm>
+          <a:prstGeom prst="rect">
+            <a:avLst/>
+          </a:prstGeom>
+          <a:noFill/>
+          <a:ln>
+            <a:noFill/>
+          </a:ln>
+          <a:effectLst/>
+        </p:spPr>
+        <p:style>
+          <a:lnRef idx="1">
+            <a:schemeClr val="accent1"/>
+          </a:lnRef>
+          <a:fillRef idx="3">
+            <a:schemeClr val="accent1"/>
+          </a:fillRef>
+          <a:effectRef idx="2">
+            <a:schemeClr val="accent1"/>
+          </a:effectRef>
+          <a:fontRef idx="minor">
+            <a:schemeClr val="lt1"/>
+          </a:fontRef>
+        </p:style>
+        <p:txBody>
+          <a:bodyPr rtlCol="0" anchor="t" lIns="125999" rIns="125999" tIns="54000" bIns="54000" wrap="square"/>
+          <a:lstStyle/>
+          <a:p>
+            <a:pPr algn="l">
+              <a:spcAft>
+                <a:spcPts val="600"/>
+              </a:spcAft>
+            </a:pPr>
+            <a:r>
+              <a:rPr sz="1400" b="1">
+                <a:solidFill>
+                  <a:srgbClr val="1F2A33"/>
+                </a:solidFill>
+                <a:latin typeface="Calibri"/>
+              </a:rPr>
+              <a:t>Fatorial: </a:t>
             </a:r>
             <a:r>
-              <a:rPr sz="1600" b="1">
+              <a:rPr sz="1400" b="1">
                 <a:solidFill>
                   <a:srgbClr val="1F2A33"/>
                 </a:solidFill>
@@ -4658,21 +4528,21 @@
                 </a:highlight>
                 <a:latin typeface="Calibri"/>
               </a:rPr>
-              <a:t>A CONFIRMAR — frase combinada com a Profa. Amanda (com ou sem resultados)</a:t>
+              <a:t>A CONFIRMAR — frase combinada com a Profa. Amanda</a:t>
             </a:r>
           </a:p>
         </p:txBody>
       </p:sp>
       <p:sp>
         <p:nvSpPr>
-          <p:cNvPr id="19" name="Rectangle 18"/>
+          <p:cNvPr id="12" name="Rectangle 11"/>
           <p:cNvSpPr/>
           <p:nvPr/>
         </p:nvSpPr>
         <p:spPr>
           <a:xfrm>
-            <a:off x="324000" y="5544000"/>
-            <a:ext cx="11520000" cy="792000"/>
+            <a:off x="324000" y="5580000"/>
+            <a:ext cx="11520000" cy="827999"/>
           </a:xfrm>
           <a:prstGeom prst="rect">
             <a:avLst/>
@@ -4715,7 +4585,7 @@
                 </a:solidFill>
                 <a:latin typeface="Calibri"/>
               </a:rPr>
-              <a:t>Cada decisão muda o resultado — por isso cada uma está justificada e registrada.</a:t>
+              <a:t>Com dados, cada decisão muda o resultado — por isso cada uma está justificada e registrada.</a:t>
             </a:r>
           </a:p>
           <a:p>
@@ -4725,7 +4595,7 @@
               </a:spcAft>
             </a:pPr>
             <a:r>
-              <a:rPr sz="1500" b="0">
+              <a:rPr sz="1600" b="0">
                 <a:solidFill>
                   <a:srgbClr val="6B7780"/>
                 </a:solidFill>
@@ -10873,8 +10743,8 @@
         </p:nvSpPr>
         <p:spPr>
           <a:xfrm>
-            <a:off x="684000" y="1944000"/>
-            <a:ext cx="2592000" cy="2592000"/>
+            <a:off x="576000" y="1872000"/>
+            <a:ext cx="2376000" cy="2376000"/>
           </a:xfrm>
           <a:prstGeom prst="rect">
             <a:avLst/>
@@ -10930,8 +10800,8 @@
         </p:nvSpPr>
         <p:spPr>
           <a:xfrm>
-            <a:off x="324000" y="4680000"/>
-            <a:ext cx="3311999" cy="432000"/>
+            <a:off x="216000" y="4356000"/>
+            <a:ext cx="3096000" cy="432000"/>
           </a:xfrm>
           <a:prstGeom prst="rect">
             <a:avLst/>
@@ -10985,8 +10855,8 @@
         </p:nvSpPr>
         <p:spPr>
           <a:xfrm>
-            <a:off x="3600000" y="2988000"/>
-            <a:ext cx="1007999" cy="503999"/>
+            <a:off x="3168000" y="2808000"/>
+            <a:ext cx="864000" cy="503999"/>
           </a:xfrm>
           <a:prstGeom prst="rightArrow">
             <a:avLst/>
@@ -11028,8 +10898,8 @@
         </p:nvSpPr>
         <p:spPr>
           <a:xfrm>
-            <a:off x="4824000" y="1944000"/>
-            <a:ext cx="237599" cy="237599"/>
+            <a:off x="4212000" y="1872000"/>
+            <a:ext cx="216000" cy="216000"/>
           </a:xfrm>
           <a:prstGeom prst="rect">
             <a:avLst/>
@@ -11071,8 +10941,8 @@
         </p:nvSpPr>
         <p:spPr>
           <a:xfrm>
-            <a:off x="5083200" y="1944000"/>
-            <a:ext cx="237599" cy="237599"/>
+            <a:off x="4449600" y="1872000"/>
+            <a:ext cx="216000" cy="216000"/>
           </a:xfrm>
           <a:prstGeom prst="rect">
             <a:avLst/>
@@ -11114,8 +10984,8 @@
         </p:nvSpPr>
         <p:spPr>
           <a:xfrm>
-            <a:off x="5342400" y="1944000"/>
-            <a:ext cx="237599" cy="237599"/>
+            <a:off x="4687200" y="1872000"/>
+            <a:ext cx="216000" cy="216000"/>
           </a:xfrm>
           <a:prstGeom prst="rect">
             <a:avLst/>
@@ -11157,8 +11027,8 @@
         </p:nvSpPr>
         <p:spPr>
           <a:xfrm>
-            <a:off x="5601600" y="1944000"/>
-            <a:ext cx="237599" cy="237599"/>
+            <a:off x="4924800" y="1872000"/>
+            <a:ext cx="216000" cy="216000"/>
           </a:xfrm>
           <a:prstGeom prst="rect">
             <a:avLst/>
@@ -11200,8 +11070,8 @@
         </p:nvSpPr>
         <p:spPr>
           <a:xfrm>
-            <a:off x="5860800" y="1944000"/>
-            <a:ext cx="237599" cy="237599"/>
+            <a:off x="5162400" y="1872000"/>
+            <a:ext cx="216000" cy="216000"/>
           </a:xfrm>
           <a:prstGeom prst="rect">
             <a:avLst/>
@@ -11243,8 +11113,8 @@
         </p:nvSpPr>
         <p:spPr>
           <a:xfrm>
-            <a:off x="6120000" y="1944000"/>
-            <a:ext cx="237599" cy="237599"/>
+            <a:off x="5400000" y="1872000"/>
+            <a:ext cx="216000" cy="216000"/>
           </a:xfrm>
           <a:prstGeom prst="rect">
             <a:avLst/>
@@ -11286,8 +11156,8 @@
         </p:nvSpPr>
         <p:spPr>
           <a:xfrm>
-            <a:off x="6379200" y="1944000"/>
-            <a:ext cx="237599" cy="237599"/>
+            <a:off x="5637600" y="1872000"/>
+            <a:ext cx="216000" cy="216000"/>
           </a:xfrm>
           <a:prstGeom prst="rect">
             <a:avLst/>
@@ -11329,8 +11199,8 @@
         </p:nvSpPr>
         <p:spPr>
           <a:xfrm>
-            <a:off x="6638400" y="1944000"/>
-            <a:ext cx="237599" cy="237599"/>
+            <a:off x="5875200" y="1872000"/>
+            <a:ext cx="216000" cy="216000"/>
           </a:xfrm>
           <a:prstGeom prst="rect">
             <a:avLst/>
@@ -11372,8 +11242,8 @@
         </p:nvSpPr>
         <p:spPr>
           <a:xfrm>
-            <a:off x="6897600" y="1944000"/>
-            <a:ext cx="237599" cy="237599"/>
+            <a:off x="6112800" y="1872000"/>
+            <a:ext cx="216000" cy="216000"/>
           </a:xfrm>
           <a:prstGeom prst="rect">
             <a:avLst/>
@@ -11415,8 +11285,8 @@
         </p:nvSpPr>
         <p:spPr>
           <a:xfrm>
-            <a:off x="7156800" y="1944000"/>
-            <a:ext cx="237599" cy="237599"/>
+            <a:off x="6350400" y="1872000"/>
+            <a:ext cx="216000" cy="216000"/>
           </a:xfrm>
           <a:prstGeom prst="rect">
             <a:avLst/>
@@ -11458,8 +11328,8 @@
         </p:nvSpPr>
         <p:spPr>
           <a:xfrm>
-            <a:off x="4824000" y="2203200"/>
-            <a:ext cx="237599" cy="237599"/>
+            <a:off x="4212000" y="2109600"/>
+            <a:ext cx="216000" cy="216000"/>
           </a:xfrm>
           <a:prstGeom prst="rect">
             <a:avLst/>
@@ -11501,8 +11371,8 @@
         </p:nvSpPr>
         <p:spPr>
           <a:xfrm>
-            <a:off x="5083200" y="2203200"/>
-            <a:ext cx="237599" cy="237599"/>
+            <a:off x="4449600" y="2109600"/>
+            <a:ext cx="216000" cy="216000"/>
           </a:xfrm>
           <a:prstGeom prst="rect">
             <a:avLst/>
@@ -11544,8 +11414,8 @@
         </p:nvSpPr>
         <p:spPr>
           <a:xfrm>
-            <a:off x="5342400" y="2203200"/>
-            <a:ext cx="237599" cy="237599"/>
+            <a:off x="4687200" y="2109600"/>
+            <a:ext cx="216000" cy="216000"/>
           </a:xfrm>
           <a:prstGeom prst="rect">
             <a:avLst/>
@@ -11587,8 +11457,8 @@
         </p:nvSpPr>
         <p:spPr>
           <a:xfrm>
-            <a:off x="5601600" y="2203200"/>
-            <a:ext cx="237599" cy="237599"/>
+            <a:off x="4924800" y="2109600"/>
+            <a:ext cx="216000" cy="216000"/>
           </a:xfrm>
           <a:prstGeom prst="rect">
             <a:avLst/>
@@ -11630,8 +11500,8 @@
         </p:nvSpPr>
         <p:spPr>
           <a:xfrm>
-            <a:off x="5860800" y="2203200"/>
-            <a:ext cx="237599" cy="237599"/>
+            <a:off x="5162400" y="2109600"/>
+            <a:ext cx="216000" cy="216000"/>
           </a:xfrm>
           <a:prstGeom prst="rect">
             <a:avLst/>
@@ -11673,8 +11543,8 @@
         </p:nvSpPr>
         <p:spPr>
           <a:xfrm>
-            <a:off x="6120000" y="2203200"/>
-            <a:ext cx="237599" cy="237599"/>
+            <a:off x="5400000" y="2109600"/>
+            <a:ext cx="216000" cy="216000"/>
           </a:xfrm>
           <a:prstGeom prst="rect">
             <a:avLst/>
@@ -11716,8 +11586,8 @@
         </p:nvSpPr>
         <p:spPr>
           <a:xfrm>
-            <a:off x="6379200" y="2203200"/>
-            <a:ext cx="237599" cy="237599"/>
+            <a:off x="5637600" y="2109600"/>
+            <a:ext cx="216000" cy="216000"/>
           </a:xfrm>
           <a:prstGeom prst="rect">
             <a:avLst/>
@@ -11759,8 +11629,8 @@
         </p:nvSpPr>
         <p:spPr>
           <a:xfrm>
-            <a:off x="6638400" y="2203200"/>
-            <a:ext cx="237599" cy="237599"/>
+            <a:off x="5875200" y="2109600"/>
+            <a:ext cx="216000" cy="216000"/>
           </a:xfrm>
           <a:prstGeom prst="rect">
             <a:avLst/>
@@ -11802,8 +11672,8 @@
         </p:nvSpPr>
         <p:spPr>
           <a:xfrm>
-            <a:off x="6897600" y="2203200"/>
-            <a:ext cx="237599" cy="237599"/>
+            <a:off x="6112800" y="2109600"/>
+            <a:ext cx="216000" cy="216000"/>
           </a:xfrm>
           <a:prstGeom prst="rect">
             <a:avLst/>
@@ -11845,8 +11715,8 @@
         </p:nvSpPr>
         <p:spPr>
           <a:xfrm>
-            <a:off x="7156800" y="2203200"/>
-            <a:ext cx="237599" cy="237599"/>
+            <a:off x="6350400" y="2109600"/>
+            <a:ext cx="216000" cy="216000"/>
           </a:xfrm>
           <a:prstGeom prst="rect">
             <a:avLst/>
@@ -11888,8 +11758,8 @@
         </p:nvSpPr>
         <p:spPr>
           <a:xfrm>
-            <a:off x="4824000" y="2462400"/>
-            <a:ext cx="237599" cy="237599"/>
+            <a:off x="4212000" y="2347200"/>
+            <a:ext cx="216000" cy="216000"/>
           </a:xfrm>
           <a:prstGeom prst="rect">
             <a:avLst/>
@@ -11931,8 +11801,8 @@
         </p:nvSpPr>
         <p:spPr>
           <a:xfrm>
-            <a:off x="5083200" y="2462400"/>
-            <a:ext cx="237599" cy="237599"/>
+            <a:off x="4449600" y="2347200"/>
+            <a:ext cx="216000" cy="216000"/>
           </a:xfrm>
           <a:prstGeom prst="rect">
             <a:avLst/>
@@ -11974,8 +11844,8 @@
         </p:nvSpPr>
         <p:spPr>
           <a:xfrm>
-            <a:off x="5342400" y="2462400"/>
-            <a:ext cx="237599" cy="237599"/>
+            <a:off x="4687200" y="2347200"/>
+            <a:ext cx="216000" cy="216000"/>
           </a:xfrm>
           <a:prstGeom prst="rect">
             <a:avLst/>
@@ -12017,8 +11887,8 @@
         </p:nvSpPr>
         <p:spPr>
           <a:xfrm>
-            <a:off x="5601600" y="2462400"/>
-            <a:ext cx="237599" cy="237599"/>
+            <a:off x="4924800" y="2347200"/>
+            <a:ext cx="216000" cy="216000"/>
           </a:xfrm>
           <a:prstGeom prst="rect">
             <a:avLst/>
@@ -12060,8 +11930,8 @@
         </p:nvSpPr>
         <p:spPr>
           <a:xfrm>
-            <a:off x="5860800" y="2462400"/>
-            <a:ext cx="237599" cy="237599"/>
+            <a:off x="5162400" y="2347200"/>
+            <a:ext cx="216000" cy="216000"/>
           </a:xfrm>
           <a:prstGeom prst="rect">
             <a:avLst/>
@@ -12103,8 +11973,8 @@
         </p:nvSpPr>
         <p:spPr>
           <a:xfrm>
-            <a:off x="6120000" y="2462400"/>
-            <a:ext cx="237599" cy="237599"/>
+            <a:off x="5400000" y="2347200"/>
+            <a:ext cx="216000" cy="216000"/>
           </a:xfrm>
           <a:prstGeom prst="rect">
             <a:avLst/>
@@ -12146,8 +12016,8 @@
         </p:nvSpPr>
         <p:spPr>
           <a:xfrm>
-            <a:off x="6379200" y="2462400"/>
-            <a:ext cx="237599" cy="237599"/>
+            <a:off x="5637600" y="2347200"/>
+            <a:ext cx="216000" cy="216000"/>
           </a:xfrm>
           <a:prstGeom prst="rect">
             <a:avLst/>
@@ -12189,8 +12059,8 @@
         </p:nvSpPr>
         <p:spPr>
           <a:xfrm>
-            <a:off x="6638400" y="2462400"/>
-            <a:ext cx="237599" cy="237599"/>
+            <a:off x="5875200" y="2347200"/>
+            <a:ext cx="216000" cy="216000"/>
           </a:xfrm>
           <a:prstGeom prst="rect">
             <a:avLst/>
@@ -12232,8 +12102,8 @@
         </p:nvSpPr>
         <p:spPr>
           <a:xfrm>
-            <a:off x="6897600" y="2462400"/>
-            <a:ext cx="237599" cy="237599"/>
+            <a:off x="6112800" y="2347200"/>
+            <a:ext cx="216000" cy="216000"/>
           </a:xfrm>
           <a:prstGeom prst="rect">
             <a:avLst/>
@@ -12275,8 +12145,8 @@
         </p:nvSpPr>
         <p:spPr>
           <a:xfrm>
-            <a:off x="7156800" y="2462400"/>
-            <a:ext cx="237599" cy="237599"/>
+            <a:off x="6350400" y="2347200"/>
+            <a:ext cx="216000" cy="216000"/>
           </a:xfrm>
           <a:prstGeom prst="rect">
             <a:avLst/>
@@ -12318,8 +12188,8 @@
         </p:nvSpPr>
         <p:spPr>
           <a:xfrm>
-            <a:off x="4824000" y="2721600"/>
-            <a:ext cx="237599" cy="237599"/>
+            <a:off x="4212000" y="2584800"/>
+            <a:ext cx="216000" cy="216000"/>
           </a:xfrm>
           <a:prstGeom prst="rect">
             <a:avLst/>
@@ -12361,8 +12231,8 @@
         </p:nvSpPr>
         <p:spPr>
           <a:xfrm>
-            <a:off x="5083200" y="2721600"/>
-            <a:ext cx="237599" cy="237599"/>
+            <a:off x="4449600" y="2584800"/>
+            <a:ext cx="216000" cy="216000"/>
           </a:xfrm>
           <a:prstGeom prst="rect">
             <a:avLst/>
@@ -12404,8 +12274,8 @@
         </p:nvSpPr>
         <p:spPr>
           <a:xfrm>
-            <a:off x="5342400" y="2721600"/>
-            <a:ext cx="237599" cy="237599"/>
+            <a:off x="4687200" y="2584800"/>
+            <a:ext cx="216000" cy="216000"/>
           </a:xfrm>
           <a:prstGeom prst="rect">
             <a:avLst/>
@@ -12447,8 +12317,8 @@
         </p:nvSpPr>
         <p:spPr>
           <a:xfrm>
-            <a:off x="5601600" y="2721600"/>
-            <a:ext cx="237599" cy="237599"/>
+            <a:off x="4924800" y="2584800"/>
+            <a:ext cx="216000" cy="216000"/>
           </a:xfrm>
           <a:prstGeom prst="rect">
             <a:avLst/>
@@ -12490,8 +12360,8 @@
         </p:nvSpPr>
         <p:spPr>
           <a:xfrm>
-            <a:off x="5860800" y="2721600"/>
-            <a:ext cx="237599" cy="237599"/>
+            <a:off x="5162400" y="2584800"/>
+            <a:ext cx="216000" cy="216000"/>
           </a:xfrm>
           <a:prstGeom prst="rect">
             <a:avLst/>
@@ -12533,8 +12403,8 @@
         </p:nvSpPr>
         <p:spPr>
           <a:xfrm>
-            <a:off x="6120000" y="2721600"/>
-            <a:ext cx="237599" cy="237599"/>
+            <a:off x="5400000" y="2584800"/>
+            <a:ext cx="216000" cy="216000"/>
           </a:xfrm>
           <a:prstGeom prst="rect">
             <a:avLst/>
@@ -12576,8 +12446,8 @@
         </p:nvSpPr>
         <p:spPr>
           <a:xfrm>
-            <a:off x="6379200" y="2721600"/>
-            <a:ext cx="237599" cy="237599"/>
+            <a:off x="5637600" y="2584800"/>
+            <a:ext cx="216000" cy="216000"/>
           </a:xfrm>
           <a:prstGeom prst="rect">
             <a:avLst/>
@@ -12619,8 +12489,8 @@
         </p:nvSpPr>
         <p:spPr>
           <a:xfrm>
-            <a:off x="6638400" y="2721600"/>
-            <a:ext cx="237599" cy="237599"/>
+            <a:off x="5875200" y="2584800"/>
+            <a:ext cx="216000" cy="216000"/>
           </a:xfrm>
           <a:prstGeom prst="rect">
             <a:avLst/>
@@ -12662,8 +12532,8 @@
         </p:nvSpPr>
         <p:spPr>
           <a:xfrm>
-            <a:off x="6897600" y="2721600"/>
-            <a:ext cx="237599" cy="237599"/>
+            <a:off x="6112800" y="2584800"/>
+            <a:ext cx="216000" cy="216000"/>
           </a:xfrm>
           <a:prstGeom prst="rect">
             <a:avLst/>
@@ -12705,8 +12575,8 @@
         </p:nvSpPr>
         <p:spPr>
           <a:xfrm>
-            <a:off x="7156800" y="2721600"/>
-            <a:ext cx="237599" cy="237599"/>
+            <a:off x="6350400" y="2584800"/>
+            <a:ext cx="216000" cy="216000"/>
           </a:xfrm>
           <a:prstGeom prst="rect">
             <a:avLst/>
@@ -12748,8 +12618,8 @@
         </p:nvSpPr>
         <p:spPr>
           <a:xfrm>
-            <a:off x="4824000" y="2980800"/>
-            <a:ext cx="237599" cy="237599"/>
+            <a:off x="4212000" y="2822400"/>
+            <a:ext cx="216000" cy="216000"/>
           </a:xfrm>
           <a:prstGeom prst="rect">
             <a:avLst/>
@@ -12791,8 +12661,8 @@
         </p:nvSpPr>
         <p:spPr>
           <a:xfrm>
-            <a:off x="5083200" y="2980800"/>
-            <a:ext cx="237599" cy="237599"/>
+            <a:off x="4449600" y="2822400"/>
+            <a:ext cx="216000" cy="216000"/>
           </a:xfrm>
           <a:prstGeom prst="rect">
             <a:avLst/>
@@ -12834,8 +12704,8 @@
         </p:nvSpPr>
         <p:spPr>
           <a:xfrm>
-            <a:off x="5342400" y="2980800"/>
-            <a:ext cx="237599" cy="237599"/>
+            <a:off x="4687200" y="2822400"/>
+            <a:ext cx="216000" cy="216000"/>
           </a:xfrm>
           <a:prstGeom prst="rect">
             <a:avLst/>
@@ -12877,8 +12747,8 @@
         </p:nvSpPr>
         <p:spPr>
           <a:xfrm>
-            <a:off x="5601600" y="2980800"/>
-            <a:ext cx="237599" cy="237599"/>
+            <a:off x="4924800" y="2822400"/>
+            <a:ext cx="216000" cy="216000"/>
           </a:xfrm>
           <a:prstGeom prst="rect">
             <a:avLst/>
@@ -12920,8 +12790,8 @@
         </p:nvSpPr>
         <p:spPr>
           <a:xfrm>
-            <a:off x="5860800" y="2980800"/>
-            <a:ext cx="237599" cy="237599"/>
+            <a:off x="5162400" y="2822400"/>
+            <a:ext cx="216000" cy="216000"/>
           </a:xfrm>
           <a:prstGeom prst="rect">
             <a:avLst/>
@@ -12963,8 +12833,8 @@
         </p:nvSpPr>
         <p:spPr>
           <a:xfrm>
-            <a:off x="6120000" y="2980800"/>
-            <a:ext cx="237599" cy="237599"/>
+            <a:off x="5400000" y="2822400"/>
+            <a:ext cx="216000" cy="216000"/>
           </a:xfrm>
           <a:prstGeom prst="rect">
             <a:avLst/>
@@ -13006,8 +12876,8 @@
         </p:nvSpPr>
         <p:spPr>
           <a:xfrm>
-            <a:off x="6379200" y="2980800"/>
-            <a:ext cx="237599" cy="237599"/>
+            <a:off x="5637600" y="2822400"/>
+            <a:ext cx="216000" cy="216000"/>
           </a:xfrm>
           <a:prstGeom prst="rect">
             <a:avLst/>
@@ -13049,8 +12919,8 @@
         </p:nvSpPr>
         <p:spPr>
           <a:xfrm>
-            <a:off x="6638400" y="2980800"/>
-            <a:ext cx="237599" cy="237599"/>
+            <a:off x="5875200" y="2822400"/>
+            <a:ext cx="216000" cy="216000"/>
           </a:xfrm>
           <a:prstGeom prst="rect">
             <a:avLst/>
@@ -13092,8 +12962,8 @@
         </p:nvSpPr>
         <p:spPr>
           <a:xfrm>
-            <a:off x="6897600" y="2980800"/>
-            <a:ext cx="237599" cy="237599"/>
+            <a:off x="6112800" y="2822400"/>
+            <a:ext cx="216000" cy="216000"/>
           </a:xfrm>
           <a:prstGeom prst="rect">
             <a:avLst/>
@@ -13135,8 +13005,8 @@
         </p:nvSpPr>
         <p:spPr>
           <a:xfrm>
-            <a:off x="7156800" y="2980800"/>
-            <a:ext cx="237599" cy="237599"/>
+            <a:off x="6350400" y="2822400"/>
+            <a:ext cx="216000" cy="216000"/>
           </a:xfrm>
           <a:prstGeom prst="rect">
             <a:avLst/>
@@ -13178,8 +13048,8 @@
         </p:nvSpPr>
         <p:spPr>
           <a:xfrm>
-            <a:off x="4824000" y="3240000"/>
-            <a:ext cx="237599" cy="237599"/>
+            <a:off x="4212000" y="3060000"/>
+            <a:ext cx="216000" cy="216000"/>
           </a:xfrm>
           <a:prstGeom prst="rect">
             <a:avLst/>
@@ -13221,8 +13091,8 @@
         </p:nvSpPr>
         <p:spPr>
           <a:xfrm>
-            <a:off x="5083200" y="3240000"/>
-            <a:ext cx="237599" cy="237599"/>
+            <a:off x="4449600" y="3060000"/>
+            <a:ext cx="216000" cy="216000"/>
           </a:xfrm>
           <a:prstGeom prst="rect">
             <a:avLst/>
@@ -13264,8 +13134,8 @@
         </p:nvSpPr>
         <p:spPr>
           <a:xfrm>
-            <a:off x="5342400" y="3240000"/>
-            <a:ext cx="237599" cy="237599"/>
+            <a:off x="4687200" y="3060000"/>
+            <a:ext cx="216000" cy="216000"/>
           </a:xfrm>
           <a:prstGeom prst="rect">
             <a:avLst/>
@@ -13307,8 +13177,8 @@
         </p:nvSpPr>
         <p:spPr>
           <a:xfrm>
-            <a:off x="5601600" y="3240000"/>
-            <a:ext cx="237599" cy="237599"/>
+            <a:off x="4924800" y="3060000"/>
+            <a:ext cx="216000" cy="216000"/>
           </a:xfrm>
           <a:prstGeom prst="rect">
             <a:avLst/>
@@ -13350,8 +13220,8 @@
         </p:nvSpPr>
         <p:spPr>
           <a:xfrm>
-            <a:off x="5860800" y="3240000"/>
-            <a:ext cx="237599" cy="237599"/>
+            <a:off x="5162400" y="3060000"/>
+            <a:ext cx="216000" cy="216000"/>
           </a:xfrm>
           <a:prstGeom prst="rect">
             <a:avLst/>
@@ -13393,8 +13263,8 @@
         </p:nvSpPr>
         <p:spPr>
           <a:xfrm>
-            <a:off x="6120000" y="3240000"/>
-            <a:ext cx="237599" cy="237599"/>
+            <a:off x="5400000" y="3060000"/>
+            <a:ext cx="216000" cy="216000"/>
           </a:xfrm>
           <a:prstGeom prst="rect">
             <a:avLst/>
@@ -13436,8 +13306,8 @@
         </p:nvSpPr>
         <p:spPr>
           <a:xfrm>
-            <a:off x="6379200" y="3240000"/>
-            <a:ext cx="237599" cy="237599"/>
+            <a:off x="5637600" y="3060000"/>
+            <a:ext cx="216000" cy="216000"/>
           </a:xfrm>
           <a:prstGeom prst="rect">
             <a:avLst/>
@@ -13479,8 +13349,8 @@
         </p:nvSpPr>
         <p:spPr>
           <a:xfrm>
-            <a:off x="6638400" y="3240000"/>
-            <a:ext cx="237599" cy="237599"/>
+            <a:off x="5875200" y="3060000"/>
+            <a:ext cx="216000" cy="216000"/>
           </a:xfrm>
           <a:prstGeom prst="rect">
             <a:avLst/>
@@ -13522,8 +13392,8 @@
         </p:nvSpPr>
         <p:spPr>
           <a:xfrm>
-            <a:off x="6897600" y="3240000"/>
-            <a:ext cx="237599" cy="237599"/>
+            <a:off x="6112800" y="3060000"/>
+            <a:ext cx="216000" cy="216000"/>
           </a:xfrm>
           <a:prstGeom prst="rect">
             <a:avLst/>
@@ -13565,8 +13435,8 @@
         </p:nvSpPr>
         <p:spPr>
           <a:xfrm>
-            <a:off x="7156800" y="3240000"/>
-            <a:ext cx="237599" cy="237599"/>
+            <a:off x="6350400" y="3060000"/>
+            <a:ext cx="216000" cy="216000"/>
           </a:xfrm>
           <a:prstGeom prst="rect">
             <a:avLst/>
@@ -13608,8 +13478,8 @@
         </p:nvSpPr>
         <p:spPr>
           <a:xfrm>
-            <a:off x="4824000" y="3499200"/>
-            <a:ext cx="237599" cy="237599"/>
+            <a:off x="4212000" y="3297600"/>
+            <a:ext cx="216000" cy="216000"/>
           </a:xfrm>
           <a:prstGeom prst="rect">
             <a:avLst/>
@@ -13651,8 +13521,8 @@
         </p:nvSpPr>
         <p:spPr>
           <a:xfrm>
-            <a:off x="5083200" y="3499200"/>
-            <a:ext cx="237599" cy="237599"/>
+            <a:off x="4449600" y="3297600"/>
+            <a:ext cx="216000" cy="216000"/>
           </a:xfrm>
           <a:prstGeom prst="rect">
             <a:avLst/>
@@ -13694,8 +13564,8 @@
         </p:nvSpPr>
         <p:spPr>
           <a:xfrm>
-            <a:off x="5342400" y="3499200"/>
-            <a:ext cx="237599" cy="237599"/>
+            <a:off x="4687200" y="3297600"/>
+            <a:ext cx="216000" cy="216000"/>
           </a:xfrm>
           <a:prstGeom prst="rect">
             <a:avLst/>
@@ -13737,8 +13607,8 @@
         </p:nvSpPr>
         <p:spPr>
           <a:xfrm>
-            <a:off x="5601600" y="3499200"/>
-            <a:ext cx="237599" cy="237599"/>
+            <a:off x="4924800" y="3297600"/>
+            <a:ext cx="216000" cy="216000"/>
           </a:xfrm>
           <a:prstGeom prst="rect">
             <a:avLst/>
@@ -13780,8 +13650,8 @@
         </p:nvSpPr>
         <p:spPr>
           <a:xfrm>
-            <a:off x="5860800" y="3499200"/>
-            <a:ext cx="237599" cy="237599"/>
+            <a:off x="5162400" y="3297600"/>
+            <a:ext cx="216000" cy="216000"/>
           </a:xfrm>
           <a:prstGeom prst="rect">
             <a:avLst/>
@@ -13823,8 +13693,8 @@
         </p:nvSpPr>
         <p:spPr>
           <a:xfrm>
-            <a:off x="6120000" y="3499200"/>
-            <a:ext cx="237599" cy="237599"/>
+            <a:off x="5400000" y="3297600"/>
+            <a:ext cx="216000" cy="216000"/>
           </a:xfrm>
           <a:prstGeom prst="rect">
             <a:avLst/>
@@ -13866,8 +13736,8 @@
         </p:nvSpPr>
         <p:spPr>
           <a:xfrm>
-            <a:off x="6379200" y="3499200"/>
-            <a:ext cx="237599" cy="237599"/>
+            <a:off x="5637600" y="3297600"/>
+            <a:ext cx="216000" cy="216000"/>
           </a:xfrm>
           <a:prstGeom prst="rect">
             <a:avLst/>
@@ -13909,8 +13779,8 @@
         </p:nvSpPr>
         <p:spPr>
           <a:xfrm>
-            <a:off x="6638400" y="3499200"/>
-            <a:ext cx="237599" cy="237599"/>
+            <a:off x="5875200" y="3297600"/>
+            <a:ext cx="216000" cy="216000"/>
           </a:xfrm>
           <a:prstGeom prst="rect">
             <a:avLst/>
@@ -13952,8 +13822,8 @@
         </p:nvSpPr>
         <p:spPr>
           <a:xfrm>
-            <a:off x="6897600" y="3499200"/>
-            <a:ext cx="237599" cy="237599"/>
+            <a:off x="6112800" y="3297600"/>
+            <a:ext cx="216000" cy="216000"/>
           </a:xfrm>
           <a:prstGeom prst="rect">
             <a:avLst/>
@@ -13995,8 +13865,8 @@
         </p:nvSpPr>
         <p:spPr>
           <a:xfrm>
-            <a:off x="7156800" y="3499200"/>
-            <a:ext cx="237599" cy="237599"/>
+            <a:off x="6350400" y="3297600"/>
+            <a:ext cx="216000" cy="216000"/>
           </a:xfrm>
           <a:prstGeom prst="rect">
             <a:avLst/>
@@ -14038,8 +13908,8 @@
         </p:nvSpPr>
         <p:spPr>
           <a:xfrm>
-            <a:off x="4824000" y="3758400"/>
-            <a:ext cx="237599" cy="237599"/>
+            <a:off x="4212000" y="3535200"/>
+            <a:ext cx="216000" cy="216000"/>
           </a:xfrm>
           <a:prstGeom prst="rect">
             <a:avLst/>
@@ -14081,8 +13951,8 @@
         </p:nvSpPr>
         <p:spPr>
           <a:xfrm>
-            <a:off x="5083200" y="3758400"/>
-            <a:ext cx="237599" cy="237599"/>
+            <a:off x="4449600" y="3535200"/>
+            <a:ext cx="216000" cy="216000"/>
           </a:xfrm>
           <a:prstGeom prst="rect">
             <a:avLst/>
@@ -14124,8 +13994,8 @@
         </p:nvSpPr>
         <p:spPr>
           <a:xfrm>
-            <a:off x="5342400" y="3758400"/>
-            <a:ext cx="237599" cy="237599"/>
+            <a:off x="4687200" y="3535200"/>
+            <a:ext cx="216000" cy="216000"/>
           </a:xfrm>
           <a:prstGeom prst="rect">
             <a:avLst/>
@@ -14167,8 +14037,8 @@
         </p:nvSpPr>
         <p:spPr>
           <a:xfrm>
-            <a:off x="5601600" y="3758400"/>
-            <a:ext cx="237599" cy="237599"/>
+            <a:off x="4924800" y="3535200"/>
+            <a:ext cx="216000" cy="216000"/>
           </a:xfrm>
           <a:prstGeom prst="rect">
             <a:avLst/>
@@ -14210,8 +14080,8 @@
         </p:nvSpPr>
         <p:spPr>
           <a:xfrm>
-            <a:off x="5860800" y="3758400"/>
-            <a:ext cx="237599" cy="237599"/>
+            <a:off x="5162400" y="3535200"/>
+            <a:ext cx="216000" cy="216000"/>
           </a:xfrm>
           <a:prstGeom prst="rect">
             <a:avLst/>
@@ -14253,8 +14123,8 @@
         </p:nvSpPr>
         <p:spPr>
           <a:xfrm>
-            <a:off x="6120000" y="3758400"/>
-            <a:ext cx="237599" cy="237599"/>
+            <a:off x="5400000" y="3535200"/>
+            <a:ext cx="216000" cy="216000"/>
           </a:xfrm>
           <a:prstGeom prst="rect">
             <a:avLst/>
@@ -14296,8 +14166,8 @@
         </p:nvSpPr>
         <p:spPr>
           <a:xfrm>
-            <a:off x="6379200" y="3758400"/>
-            <a:ext cx="237599" cy="237599"/>
+            <a:off x="5637600" y="3535200"/>
+            <a:ext cx="216000" cy="216000"/>
           </a:xfrm>
           <a:prstGeom prst="rect">
             <a:avLst/>
@@ -14339,8 +14209,8 @@
         </p:nvSpPr>
         <p:spPr>
           <a:xfrm>
-            <a:off x="6638400" y="3758400"/>
-            <a:ext cx="237599" cy="237599"/>
+            <a:off x="5875200" y="3535200"/>
+            <a:ext cx="216000" cy="216000"/>
           </a:xfrm>
           <a:prstGeom prst="rect">
             <a:avLst/>
@@ -14382,8 +14252,8 @@
         </p:nvSpPr>
         <p:spPr>
           <a:xfrm>
-            <a:off x="6897600" y="3758400"/>
-            <a:ext cx="237599" cy="237599"/>
+            <a:off x="6112800" y="3535200"/>
+            <a:ext cx="216000" cy="216000"/>
           </a:xfrm>
           <a:prstGeom prst="rect">
             <a:avLst/>
@@ -14425,8 +14295,8 @@
         </p:nvSpPr>
         <p:spPr>
           <a:xfrm>
-            <a:off x="7156800" y="3758400"/>
-            <a:ext cx="237599" cy="237599"/>
+            <a:off x="6350400" y="3535200"/>
+            <a:ext cx="216000" cy="216000"/>
           </a:xfrm>
           <a:prstGeom prst="rect">
             <a:avLst/>
@@ -14468,8 +14338,8 @@
         </p:nvSpPr>
         <p:spPr>
           <a:xfrm>
-            <a:off x="4824000" y="4017600"/>
-            <a:ext cx="237599" cy="237599"/>
+            <a:off x="4212000" y="3772800"/>
+            <a:ext cx="216000" cy="216000"/>
           </a:xfrm>
           <a:prstGeom prst="rect">
             <a:avLst/>
@@ -14511,8 +14381,8 @@
         </p:nvSpPr>
         <p:spPr>
           <a:xfrm>
-            <a:off x="5083200" y="4017600"/>
-            <a:ext cx="237599" cy="237599"/>
+            <a:off x="4449600" y="3772800"/>
+            <a:ext cx="216000" cy="216000"/>
           </a:xfrm>
           <a:prstGeom prst="rect">
             <a:avLst/>
@@ -14554,8 +14424,8 @@
         </p:nvSpPr>
         <p:spPr>
           <a:xfrm>
-            <a:off x="5342400" y="4017600"/>
-            <a:ext cx="237599" cy="237599"/>
+            <a:off x="4687200" y="3772800"/>
+            <a:ext cx="216000" cy="216000"/>
           </a:xfrm>
           <a:prstGeom prst="rect">
             <a:avLst/>
@@ -14597,8 +14467,8 @@
         </p:nvSpPr>
         <p:spPr>
           <a:xfrm>
-            <a:off x="5601600" y="4017600"/>
-            <a:ext cx="237599" cy="237599"/>
+            <a:off x="4924800" y="3772800"/>
+            <a:ext cx="216000" cy="216000"/>
           </a:xfrm>
           <a:prstGeom prst="rect">
             <a:avLst/>
@@ -14640,8 +14510,8 @@
         </p:nvSpPr>
         <p:spPr>
           <a:xfrm>
-            <a:off x="5860800" y="4017600"/>
-            <a:ext cx="237599" cy="237599"/>
+            <a:off x="5162400" y="3772800"/>
+            <a:ext cx="216000" cy="216000"/>
           </a:xfrm>
           <a:prstGeom prst="rect">
             <a:avLst/>
@@ -14683,8 +14553,8 @@
         </p:nvSpPr>
         <p:spPr>
           <a:xfrm>
-            <a:off x="6120000" y="4017600"/>
-            <a:ext cx="237599" cy="237599"/>
+            <a:off x="5400000" y="3772800"/>
+            <a:ext cx="216000" cy="216000"/>
           </a:xfrm>
           <a:prstGeom prst="rect">
             <a:avLst/>
@@ -14726,8 +14596,8 @@
         </p:nvSpPr>
         <p:spPr>
           <a:xfrm>
-            <a:off x="6379200" y="4017600"/>
-            <a:ext cx="237599" cy="237599"/>
+            <a:off x="5637600" y="3772800"/>
+            <a:ext cx="216000" cy="216000"/>
           </a:xfrm>
           <a:prstGeom prst="rect">
             <a:avLst/>
@@ -14769,8 +14639,8 @@
         </p:nvSpPr>
         <p:spPr>
           <a:xfrm>
-            <a:off x="6638400" y="4017600"/>
-            <a:ext cx="237599" cy="237599"/>
+            <a:off x="5875200" y="3772800"/>
+            <a:ext cx="216000" cy="216000"/>
           </a:xfrm>
           <a:prstGeom prst="rect">
             <a:avLst/>
@@ -14812,8 +14682,8 @@
         </p:nvSpPr>
         <p:spPr>
           <a:xfrm>
-            <a:off x="6897600" y="4017600"/>
-            <a:ext cx="237599" cy="237599"/>
+            <a:off x="6112800" y="3772800"/>
+            <a:ext cx="216000" cy="216000"/>
           </a:xfrm>
           <a:prstGeom prst="rect">
             <a:avLst/>
@@ -14855,8 +14725,8 @@
         </p:nvSpPr>
         <p:spPr>
           <a:xfrm>
-            <a:off x="7156800" y="4017600"/>
-            <a:ext cx="237599" cy="237599"/>
+            <a:off x="6350400" y="3772800"/>
+            <a:ext cx="216000" cy="216000"/>
           </a:xfrm>
           <a:prstGeom prst="rect">
             <a:avLst/>
@@ -14898,8 +14768,8 @@
         </p:nvSpPr>
         <p:spPr>
           <a:xfrm>
-            <a:off x="4824000" y="4276800"/>
-            <a:ext cx="237599" cy="237599"/>
+            <a:off x="4212000" y="4010400"/>
+            <a:ext cx="216000" cy="216000"/>
           </a:xfrm>
           <a:prstGeom prst="rect">
             <a:avLst/>
@@ -14941,8 +14811,8 @@
         </p:nvSpPr>
         <p:spPr>
           <a:xfrm>
-            <a:off x="5083200" y="4276800"/>
-            <a:ext cx="237599" cy="237599"/>
+            <a:off x="4449600" y="4010400"/>
+            <a:ext cx="216000" cy="216000"/>
           </a:xfrm>
           <a:prstGeom prst="rect">
             <a:avLst/>
@@ -14984,8 +14854,8 @@
         </p:nvSpPr>
         <p:spPr>
           <a:xfrm>
-            <a:off x="5342400" y="4276800"/>
-            <a:ext cx="237599" cy="237599"/>
+            <a:off x="4687200" y="4010400"/>
+            <a:ext cx="216000" cy="216000"/>
           </a:xfrm>
           <a:prstGeom prst="rect">
             <a:avLst/>
@@ -15027,8 +14897,8 @@
         </p:nvSpPr>
         <p:spPr>
           <a:xfrm>
-            <a:off x="5601600" y="4276800"/>
-            <a:ext cx="237599" cy="237599"/>
+            <a:off x="4924800" y="4010400"/>
+            <a:ext cx="216000" cy="216000"/>
           </a:xfrm>
           <a:prstGeom prst="rect">
             <a:avLst/>
@@ -15070,8 +14940,8 @@
         </p:nvSpPr>
         <p:spPr>
           <a:xfrm>
-            <a:off x="5860800" y="4276800"/>
-            <a:ext cx="237599" cy="237599"/>
+            <a:off x="5162400" y="4010400"/>
+            <a:ext cx="216000" cy="216000"/>
           </a:xfrm>
           <a:prstGeom prst="rect">
             <a:avLst/>
@@ -15113,8 +14983,8 @@
         </p:nvSpPr>
         <p:spPr>
           <a:xfrm>
-            <a:off x="6120000" y="4276800"/>
-            <a:ext cx="237599" cy="237599"/>
+            <a:off x="5400000" y="4010400"/>
+            <a:ext cx="216000" cy="216000"/>
           </a:xfrm>
           <a:prstGeom prst="rect">
             <a:avLst/>
@@ -15156,8 +15026,8 @@
         </p:nvSpPr>
         <p:spPr>
           <a:xfrm>
-            <a:off x="6379200" y="4276800"/>
-            <a:ext cx="237599" cy="237599"/>
+            <a:off x="5637600" y="4010400"/>
+            <a:ext cx="216000" cy="216000"/>
           </a:xfrm>
           <a:prstGeom prst="rect">
             <a:avLst/>
@@ -15199,8 +15069,8 @@
         </p:nvSpPr>
         <p:spPr>
           <a:xfrm>
-            <a:off x="6638400" y="4276800"/>
-            <a:ext cx="237599" cy="237599"/>
+            <a:off x="5875200" y="4010400"/>
+            <a:ext cx="216000" cy="216000"/>
           </a:xfrm>
           <a:prstGeom prst="rect">
             <a:avLst/>
@@ -15242,8 +15112,8 @@
         </p:nvSpPr>
         <p:spPr>
           <a:xfrm>
-            <a:off x="6897600" y="4276800"/>
-            <a:ext cx="237599" cy="237599"/>
+            <a:off x="6112800" y="4010400"/>
+            <a:ext cx="216000" cy="216000"/>
           </a:xfrm>
           <a:prstGeom prst="rect">
             <a:avLst/>
@@ -15285,8 +15155,8 @@
         </p:nvSpPr>
         <p:spPr>
           <a:xfrm>
-            <a:off x="7156800" y="4276800"/>
-            <a:ext cx="237599" cy="237599"/>
+            <a:off x="6350400" y="4010400"/>
+            <a:ext cx="216000" cy="216000"/>
           </a:xfrm>
           <a:prstGeom prst="rect">
             <a:avLst/>
@@ -15328,8 +15198,8 @@
         </p:nvSpPr>
         <p:spPr>
           <a:xfrm>
-            <a:off x="4320000" y="4680000"/>
-            <a:ext cx="3600000" cy="432000"/>
+            <a:off x="3671999" y="4356000"/>
+            <a:ext cx="3456000" cy="684000"/>
           </a:xfrm>
           <a:prstGeom prst="rect">
             <a:avLst/>
@@ -15383,8 +15253,8 @@
         </p:nvSpPr>
         <p:spPr>
           <a:xfrm>
-            <a:off x="4320000" y="5148000"/>
-            <a:ext cx="3600000" cy="288000"/>
+            <a:off x="3671999" y="5076000"/>
+            <a:ext cx="3456000" cy="288000"/>
           </a:xfrm>
           <a:prstGeom prst="rect">
             <a:avLst/>
@@ -15438,8 +15308,8 @@
         </p:nvSpPr>
         <p:spPr>
           <a:xfrm>
-            <a:off x="8243999" y="1944000"/>
-            <a:ext cx="3671999" cy="3240000"/>
+            <a:off x="7416000" y="1655999"/>
+            <a:ext cx="4500000" cy="4536000"/>
           </a:xfrm>
           <a:prstGeom prst="rect">
             <a:avLst/>
@@ -15467,7 +15337,7 @@
           </a:fontRef>
         </p:style>
         <p:txBody>
-          <a:bodyPr rtlCol="0" anchor="t" lIns="125999" rIns="125999" tIns="54000" bIns="54000" wrap="square"/>
+          <a:bodyPr rtlCol="0" anchor="ctr" lIns="125999" rIns="125999" tIns="54000" bIns="54000" wrap="square"/>
           <a:lstStyle/>
           <a:p>
             <a:pPr algn="l">
@@ -15476,7 +15346,7 @@
               </a:spcAft>
             </a:pPr>
             <a:r>
-              <a:rPr sz="2000" b="1">
+              <a:rPr sz="1900" b="1">
                 <a:solidFill>
                   <a:srgbClr val="3B848E"/>
                 </a:solidFill>
@@ -15498,7 +15368,7 @@
                 </a:solidFill>
                 <a:latin typeface="Calibri"/>
               </a:rPr>
-              <a:t>a menor área com dados do Censo — como um quarteirão, ou poucos quarteirões</a:t>
+              <a:t>a menor área com dados do Censo: como um quarteirão, ou poucos</a:t>
             </a:r>
           </a:p>
           <a:p>
@@ -15508,13 +15378,13 @@
               </a:spcAft>
             </a:pPr>
             <a:r>
-              <a:rPr sz="2000" b="1">
+              <a:rPr sz="1900" b="1">
                 <a:solidFill>
                   <a:srgbClr val="3B848E"/>
                 </a:solidFill>
                 <a:latin typeface="Calibri"/>
               </a:rPr>
-              <a:t>Referência</a:t>
+              <a:t>Vulnerabilidade à saúde</a:t>
             </a:r>
           </a:p>
           <a:p>
@@ -15530,7 +15400,7 @@
                 </a:solidFill>
                 <a:latin typeface="Calibri"/>
               </a:rPr>
-              <a:t>Índice de Vulnerabilidade da Saúde de Belo Horizonte, 2012 (SMS-BH, 2013)</a:t>
+              <a:t>condições do lugar (saneamento, renda, escolaridade) que deixam os moradores mais expostos a adoecer</a:t>
             </a:r>
           </a:p>
           <a:p>
@@ -15540,13 +15410,13 @@
               </a:spcAft>
             </a:pPr>
             <a:r>
-              <a:rPr sz="2000" b="1">
+              <a:rPr sz="1900" b="1">
                 <a:solidFill>
                   <a:srgbClr val="3B848E"/>
                 </a:solidFill>
                 <a:latin typeface="Calibri"/>
               </a:rPr>
-              <a:t>Lacuna</a:t>
+              <a:t>Para quê</a:t>
             </a:r>
           </a:p>
           <a:p>
@@ -15562,7 +15432,39 @@
                 </a:solidFill>
                 <a:latin typeface="Calibri"/>
               </a:rPr>
-              <a:t>esse índice ainda não existia com o Censo 2022 para várias cidades</a:t>
+              <a:t>achar, dentro da cidade, as áreas com condições mais desfavoráveis (IVS de Belo Horizonte, 2012)</a:t>
+            </a:r>
+          </a:p>
+          <a:p>
+            <a:pPr algn="l">
+              <a:spcAft>
+                <a:spcPts val="400"/>
+              </a:spcAft>
+            </a:pPr>
+            <a:r>
+              <a:rPr sz="1900" b="1">
+                <a:solidFill>
+                  <a:srgbClr val="3B848E"/>
+                </a:solidFill>
+                <a:latin typeface="Calibri"/>
+              </a:rPr>
+              <a:t>Lacuna</a:t>
+            </a:r>
+          </a:p>
+          <a:p>
+            <a:pPr algn="l">
+              <a:spcAft>
+                <a:spcPts val="400"/>
+              </a:spcAft>
+            </a:pPr>
+            <a:r>
+              <a:rPr sz="1700" b="0">
+                <a:solidFill>
+                  <a:srgbClr val="1F2A33"/>
+                </a:solidFill>
+                <a:latin typeface="Calibri"/>
+              </a:rPr>
+              <a:t>não havia esse índice com o Censo 2022 para os municípios estudados</a:t>
             </a:r>
           </a:p>
         </p:txBody>
@@ -15648,8 +15550,8 @@
         </p:nvSpPr>
         <p:spPr>
           <a:xfrm>
-            <a:off x="324000" y="1692000"/>
-            <a:ext cx="11520000" cy="1188000"/>
+            <a:off x="324000" y="1655999"/>
+            <a:ext cx="11520000" cy="1332000"/>
           </a:xfrm>
           <a:prstGeom prst="rect">
             <a:avLst/>
@@ -15686,7 +15588,7 @@
               </a:spcAft>
             </a:pPr>
             <a:r>
-              <a:rPr sz="1800" b="1">
+              <a:rPr sz="1900" b="1">
                 <a:solidFill>
                   <a:srgbClr val="3B848E"/>
                 </a:solidFill>
@@ -15702,7 +15604,7 @@
               </a:spcAft>
             </a:pPr>
             <a:r>
-              <a:rPr sz="1800" b="1">
+              <a:rPr sz="2000" b="1">
                 <a:solidFill>
                   <a:srgbClr val="1F2A33"/>
                 </a:solidFill>
@@ -15714,7 +15616,7 @@
               <a:t>A CONFIRMAR — texto literal da Profa. Amanda. Provisório (relatório): </a:t>
             </a:r>
             <a:r>
-              <a:rPr sz="1800" b="0">
+              <a:rPr sz="2000" b="0">
                 <a:solidFill>
                   <a:srgbClr val="1F2A33"/>
                 </a:solidFill>
@@ -15733,8 +15635,8 @@
         </p:nvSpPr>
         <p:spPr>
           <a:xfrm>
-            <a:off x="324000" y="3131999"/>
-            <a:ext cx="5688000" cy="1655999"/>
+            <a:off x="324000" y="3204000"/>
+            <a:ext cx="5688000" cy="1764000"/>
           </a:xfrm>
           <a:prstGeom prst="rect">
             <a:avLst/>
@@ -15771,7 +15673,7 @@
               </a:spcAft>
             </a:pPr>
             <a:r>
-              <a:rPr sz="1700" b="1">
+              <a:rPr sz="1900" b="1">
                 <a:solidFill>
                   <a:srgbClr val="3B848E"/>
                 </a:solidFill>
@@ -15787,7 +15689,7 @@
               </a:spcAft>
             </a:pPr>
             <a:r>
-              <a:rPr sz="2200" b="1">
+              <a:rPr sz="2400" b="1">
                 <a:solidFill>
                   <a:srgbClr val="1F2A33"/>
                 </a:solidFill>
@@ -15806,8 +15708,8 @@
         </p:nvSpPr>
         <p:spPr>
           <a:xfrm>
-            <a:off x="450000" y="4356000"/>
-            <a:ext cx="1512000" cy="324000"/>
+            <a:off x="450000" y="4500000"/>
+            <a:ext cx="1584000" cy="360000"/>
           </a:xfrm>
           <a:prstGeom prst="roundRect">
             <a:avLst/>
@@ -15844,7 +15746,7 @@
               </a:spcAft>
             </a:pPr>
             <a:r>
-              <a:rPr sz="1500" b="1">
+              <a:rPr sz="1600" b="1">
                 <a:solidFill>
                   <a:srgbClr val="FFFFFF"/>
                 </a:solidFill>
@@ -15863,8 +15765,8 @@
         </p:nvSpPr>
         <p:spPr>
           <a:xfrm>
-            <a:off x="6155999" y="3131999"/>
-            <a:ext cx="5688000" cy="1655999"/>
+            <a:off x="6155999" y="3204000"/>
+            <a:ext cx="5688000" cy="1764000"/>
           </a:xfrm>
           <a:prstGeom prst="rect">
             <a:avLst/>
@@ -15901,7 +15803,7 @@
               </a:spcAft>
             </a:pPr>
             <a:r>
-              <a:rPr sz="1700" b="1">
+              <a:rPr sz="1900" b="1">
                 <a:solidFill>
                   <a:srgbClr val="3B848E"/>
                 </a:solidFill>
@@ -15917,7 +15819,7 @@
               </a:spcAft>
             </a:pPr>
             <a:r>
-              <a:rPr sz="2200" b="1">
+              <a:rPr sz="2400" b="1">
                 <a:solidFill>
                   <a:srgbClr val="1F2A33"/>
                 </a:solidFill>
@@ -15936,8 +15838,8 @@
         </p:nvSpPr>
         <p:spPr>
           <a:xfrm>
-            <a:off x="6282000" y="4356000"/>
-            <a:ext cx="1512000" cy="324000"/>
+            <a:off x="6282000" y="4500000"/>
+            <a:ext cx="1584000" cy="360000"/>
           </a:xfrm>
           <a:prstGeom prst="roundRect">
             <a:avLst/>
@@ -15974,7 +15876,7 @@
               </a:spcAft>
             </a:pPr>
             <a:r>
-              <a:rPr sz="1500" b="1">
+              <a:rPr sz="1600" b="1">
                 <a:solidFill>
                   <a:srgbClr val="FFFFFF"/>
                 </a:solidFill>
@@ -15993,8 +15895,8 @@
         </p:nvSpPr>
         <p:spPr>
           <a:xfrm>
-            <a:off x="324000" y="5184000"/>
-            <a:ext cx="11520000" cy="576000"/>
+            <a:off x="324000" y="5220000"/>
+            <a:ext cx="11520000" cy="864000"/>
           </a:xfrm>
           <a:prstGeom prst="rect">
             <a:avLst/>
@@ -16031,22 +15933,22 @@
               </a:spcAft>
             </a:pPr>
             <a:r>
-              <a:rPr sz="2000" b="1">
+              <a:rPr sz="2100" b="1">
                 <a:solidFill>
                   <a:srgbClr val="3B848E"/>
                 </a:solidFill>
                 <a:latin typeface="Calibri"/>
               </a:rPr>
-              <a:t>Hoje:  </a:t>
+              <a:t>Hoje: </a:t>
             </a:r>
             <a:r>
-              <a:rPr sz="2000" b="0">
+              <a:rPr sz="2100" b="0">
                 <a:solidFill>
                   <a:srgbClr val="1F2A33"/>
                 </a:solidFill>
                 <a:latin typeface="Calibri"/>
               </a:rPr>
-              <a:t>como montei a base   →   o que os dados me mostraram   →   o que muda no índice</a:t>
+              <a:t>a etapa que vem antes do índice — o que o Censo 2022 me obrigou a decidir, e como cada decisão muda o resultado</a:t>
             </a:r>
           </a:p>
         </p:txBody>
@@ -16077,8 +15979,63 @@
         </p:nvSpPr>
         <p:spPr>
           <a:xfrm>
-            <a:off x="201600" y="846000"/>
-            <a:ext cx="11807999" cy="684000"/>
+            <a:off x="201600" y="792000"/>
+            <a:ext cx="7200000" cy="270000"/>
+          </a:xfrm>
+          <a:prstGeom prst="rect">
+            <a:avLst/>
+          </a:prstGeom>
+          <a:noFill/>
+          <a:ln>
+            <a:noFill/>
+          </a:ln>
+          <a:effectLst/>
+        </p:spPr>
+        <p:style>
+          <a:lnRef idx="1">
+            <a:schemeClr val="accent1"/>
+          </a:lnRef>
+          <a:fillRef idx="3">
+            <a:schemeClr val="accent1"/>
+          </a:fillRef>
+          <a:effectRef idx="2">
+            <a:schemeClr val="accent1"/>
+          </a:effectRef>
+          <a:fontRef idx="minor">
+            <a:schemeClr val="lt1"/>
+          </a:fontRef>
+        </p:style>
+        <p:txBody>
+          <a:bodyPr rtlCol="0" anchor="t" lIns="125999" rIns="125999" tIns="54000" bIns="54000" wrap="square"/>
+          <a:lstStyle/>
+          <a:p>
+            <a:pPr algn="l">
+              <a:spcAft>
+                <a:spcPts val="0"/>
+              </a:spcAft>
+            </a:pPr>
+            <a:r>
+              <a:rPr sz="1300" b="1">
+                <a:solidFill>
+                  <a:srgbClr val="3B848E"/>
+                </a:solidFill>
+                <a:latin typeface="Calibri"/>
+              </a:rPr>
+              <a:t>METODOLOGIA</a:t>
+            </a:r>
+          </a:p>
+        </p:txBody>
+      </p:sp>
+      <p:sp>
+        <p:nvSpPr>
+          <p:cNvPr id="3" name="Rectangle 2"/>
+          <p:cNvSpPr/>
+          <p:nvPr/>
+        </p:nvSpPr>
+        <p:spPr>
+          <a:xfrm>
+            <a:off x="201600" y="1026000"/>
+            <a:ext cx="11807999" cy="612000"/>
           </a:xfrm>
           <a:prstGeom prst="rect">
             <a:avLst/>
@@ -16126,7 +16083,7 @@
       </p:sp>
       <p:sp>
         <p:nvSpPr>
-          <p:cNvPr id="3" name="Rectangle 2"/>
+          <p:cNvPr id="4" name="Rectangle 3"/>
           <p:cNvSpPr/>
           <p:nvPr/>
         </p:nvSpPr>
@@ -16183,14 +16140,14 @@
       </p:sp>
       <p:sp>
         <p:nvSpPr>
-          <p:cNvPr id="4" name="Rectangle 3"/>
+          <p:cNvPr id="5" name="Rectangle 4"/>
           <p:cNvSpPr/>
           <p:nvPr/>
         </p:nvSpPr>
         <p:spPr>
           <a:xfrm>
             <a:off x="324000" y="2160000"/>
-            <a:ext cx="2951999" cy="2951999"/>
+            <a:ext cx="2951999" cy="3096000"/>
           </a:xfrm>
           <a:prstGeom prst="rect">
             <a:avLst/>
@@ -16227,7 +16184,7 @@
               </a:spcAft>
             </a:pPr>
             <a:r>
-              <a:rPr sz="1800" b="0">
+              <a:rPr sz="2000" b="0">
                 <a:solidFill>
                   <a:srgbClr val="1F2A33"/>
                 </a:solidFill>
@@ -16243,7 +16200,7 @@
               </a:spcAft>
             </a:pPr>
             <a:r>
-              <a:rPr sz="1800" b="0">
+              <a:rPr sz="2000" b="0">
                 <a:solidFill>
                   <a:srgbClr val="1F2A33"/>
                 </a:solidFill>
@@ -16259,7 +16216,7 @@
               </a:spcAft>
             </a:pPr>
             <a:r>
-              <a:rPr sz="1800" b="0">
+              <a:rPr sz="2000" b="0">
                 <a:solidFill>
                   <a:srgbClr val="1F2A33"/>
                 </a:solidFill>
@@ -16272,7 +16229,7 @@
       </p:sp>
       <p:sp>
         <p:nvSpPr>
-          <p:cNvPr id="5" name="Rectangle 4"/>
+          <p:cNvPr id="6" name="Rectangle 5"/>
           <p:cNvSpPr/>
           <p:nvPr/>
         </p:nvSpPr>
@@ -16329,14 +16286,14 @@
       </p:sp>
       <p:sp>
         <p:nvSpPr>
-          <p:cNvPr id="6" name="Rectangle 5"/>
+          <p:cNvPr id="7" name="Rectangle 6"/>
           <p:cNvSpPr/>
           <p:nvPr/>
         </p:nvSpPr>
         <p:spPr>
           <a:xfrm>
             <a:off x="3420000" y="2160000"/>
-            <a:ext cx="2951999" cy="2951999"/>
+            <a:ext cx="2951999" cy="3096000"/>
           </a:xfrm>
           <a:prstGeom prst="rect">
             <a:avLst/>
@@ -16373,7 +16330,7 @@
               </a:spcAft>
             </a:pPr>
             <a:r>
-              <a:rPr sz="1800" b="0">
+              <a:rPr sz="2000" b="0">
                 <a:solidFill>
                   <a:srgbClr val="1F2A33"/>
                 </a:solidFill>
@@ -16389,7 +16346,7 @@
               </a:spcAft>
             </a:pPr>
             <a:r>
-              <a:rPr sz="1800" b="0">
+              <a:rPr sz="2000" b="0">
                 <a:solidFill>
                   <a:srgbClr val="1F2A33"/>
                 </a:solidFill>
@@ -16405,7 +16362,7 @@
               </a:spcAft>
             </a:pPr>
             <a:r>
-              <a:rPr sz="1800" b="0">
+              <a:rPr sz="2000" b="0">
                 <a:solidFill>
                   <a:srgbClr val="1F2A33"/>
                 </a:solidFill>
@@ -16421,7 +16378,7 @@
               </a:spcAft>
             </a:pPr>
             <a:r>
-              <a:rPr sz="1800" b="0">
+              <a:rPr sz="2000" b="0">
                 <a:solidFill>
                   <a:srgbClr val="1F2A33"/>
                 </a:solidFill>
@@ -16434,14 +16391,14 @@
       </p:sp>
       <p:sp>
         <p:nvSpPr>
-          <p:cNvPr id="7" name="Rectangle 6"/>
+          <p:cNvPr id="8" name="Rectangle 7"/>
           <p:cNvSpPr/>
           <p:nvPr/>
         </p:nvSpPr>
         <p:spPr>
           <a:xfrm>
-            <a:off x="324000" y="5220000"/>
-            <a:ext cx="6048000" cy="576000"/>
+            <a:off x="324000" y="5364000"/>
+            <a:ext cx="6048000" cy="792000"/>
           </a:xfrm>
           <a:prstGeom prst="rect">
             <a:avLst/>
@@ -16476,20 +16433,20 @@
               </a:spcAft>
             </a:pPr>
             <a:r>
-              <a:rPr sz="1500" b="0">
+              <a:rPr sz="1600" b="0">
                 <a:solidFill>
                   <a:srgbClr val="6B7780"/>
                 </a:solidFill>
                 <a:latin typeface="Calibri"/>
               </a:rPr>
-              <a:t>↑ valor = ↑ vulnerabilidade. Sete variáveis, as mesmas do índice de 2012.</a:t>
+              <a:t>↑ valor = ↑ vulnerabilidade. As variáveis do IVS 2012 que existem no Censo 2022, com adaptações (reserva R1).</a:t>
             </a:r>
           </a:p>
         </p:txBody>
       </p:sp>
       <p:sp>
         <p:nvSpPr>
-          <p:cNvPr id="8" name="Rectangle 7"/>
+          <p:cNvPr id="9" name="Rectangle 8"/>
           <p:cNvSpPr/>
           <p:nvPr/>
         </p:nvSpPr>
@@ -16549,7 +16506,7 @@
               </a:spcAft>
             </a:pPr>
             <a:r>
-              <a:rPr sz="1600" b="0">
+              <a:rPr sz="1700" b="0">
                 <a:solidFill>
                   <a:srgbClr val="1F2A33"/>
                 </a:solidFill>
@@ -16562,13 +16519,13 @@
       </p:sp>
       <p:sp>
         <p:nvSpPr>
-          <p:cNvPr id="9" name="Rectangle 8"/>
+          <p:cNvPr id="10" name="Rectangle 9"/>
           <p:cNvSpPr/>
           <p:nvPr/>
         </p:nvSpPr>
         <p:spPr>
           <a:xfrm>
-            <a:off x="6696000" y="2538000"/>
+            <a:off x="6696000" y="2520000"/>
             <a:ext cx="5148000" cy="360000"/>
           </a:xfrm>
           <a:prstGeom prst="rect">
@@ -16604,7 +16561,7 @@
               </a:spcAft>
             </a:pPr>
             <a:r>
-              <a:rPr sz="1500" b="0">
+              <a:rPr sz="1600" b="0">
                 <a:solidFill>
                   <a:srgbClr val="6B7780"/>
                 </a:solidFill>
@@ -16617,14 +16574,14 @@
       </p:sp>
       <p:sp>
         <p:nvSpPr>
-          <p:cNvPr id="10" name="Rectangle 9"/>
+          <p:cNvPr id="11" name="Rectangle 10"/>
           <p:cNvSpPr/>
           <p:nvPr/>
         </p:nvSpPr>
         <p:spPr>
           <a:xfrm>
-            <a:off x="6696000" y="2988000"/>
-            <a:ext cx="5148000" cy="684000"/>
+            <a:off x="6696000" y="2951999"/>
+            <a:ext cx="5148000" cy="648000"/>
           </a:xfrm>
           <a:prstGeom prst="rect">
             <a:avLst/>
@@ -16674,13 +16631,13 @@
       </p:sp>
       <p:sp>
         <p:nvSpPr>
-          <p:cNvPr id="11" name="Rectangle 10"/>
+          <p:cNvPr id="12" name="Rectangle 11"/>
           <p:cNvSpPr/>
           <p:nvPr/>
         </p:nvSpPr>
         <p:spPr>
           <a:xfrm>
-            <a:off x="6696000" y="3762000"/>
+            <a:off x="6696000" y="3671999"/>
             <a:ext cx="5148000" cy="360000"/>
           </a:xfrm>
           <a:prstGeom prst="rect">
@@ -16716,7 +16673,7 @@
               </a:spcAft>
             </a:pPr>
             <a:r>
-              <a:rPr sz="1500" b="0">
+              <a:rPr sz="1600" b="0">
                 <a:solidFill>
                   <a:srgbClr val="6B7780"/>
                 </a:solidFill>
@@ -16729,13 +16686,13 @@
       </p:sp>
       <p:sp>
         <p:nvSpPr>
-          <p:cNvPr id="12" name="Rectangle 11"/>
+          <p:cNvPr id="13" name="Rectangle 12"/>
           <p:cNvSpPr/>
           <p:nvPr/>
         </p:nvSpPr>
         <p:spPr>
           <a:xfrm>
-            <a:off x="6696000" y="4212000"/>
+            <a:off x="6696000" y="4103999"/>
             <a:ext cx="5148000" cy="756000"/>
           </a:xfrm>
           <a:prstGeom prst="rect">
@@ -16789,7 +16746,7 @@
               </a:spcAft>
             </a:pPr>
             <a:r>
-              <a:rPr sz="1600" b="0">
+              <a:rPr sz="1700" b="0">
                 <a:solidFill>
                   <a:srgbClr val="FFFFFF"/>
                 </a:solidFill>
@@ -16802,7 +16759,62 @@
       </p:sp>
       <p:sp>
         <p:nvSpPr>
-          <p:cNvPr id="13" name="Rectangle 12"/>
+          <p:cNvPr id="14" name="Rectangle 13"/>
+          <p:cNvSpPr/>
+          <p:nvPr/>
+        </p:nvSpPr>
+        <p:spPr>
+          <a:xfrm>
+            <a:off x="6696000" y="4968000"/>
+            <a:ext cx="5148000" cy="576000"/>
+          </a:xfrm>
+          <a:prstGeom prst="rect">
+            <a:avLst/>
+          </a:prstGeom>
+          <a:noFill/>
+          <a:ln>
+            <a:noFill/>
+          </a:ln>
+          <a:effectLst/>
+        </p:spPr>
+        <p:style>
+          <a:lnRef idx="1">
+            <a:schemeClr val="accent1"/>
+          </a:lnRef>
+          <a:fillRef idx="3">
+            <a:schemeClr val="accent1"/>
+          </a:fillRef>
+          <a:effectRef idx="2">
+            <a:schemeClr val="accent1"/>
+          </a:effectRef>
+          <a:fontRef idx="minor">
+            <a:schemeClr val="lt1"/>
+          </a:fontRef>
+        </p:style>
+        <p:txBody>
+          <a:bodyPr rtlCol="0" anchor="t" lIns="125999" rIns="125999" tIns="54000" bIns="54000" wrap="square"/>
+          <a:lstStyle/>
+          <a:p>
+            <a:pPr algn="ctr">
+              <a:spcAft>
+                <a:spcPts val="600"/>
+              </a:spcAft>
+            </a:pPr>
+            <a:r>
+              <a:rPr sz="1600" b="1">
+                <a:solidFill>
+                  <a:srgbClr val="D8634E"/>
+                </a:solidFill>
+                <a:latin typeface="Calibri"/>
+              </a:rPr>
+              <a:t>A exclusão rural é desigual: passa de 10% em 29 dos 70 municípios (R6).</a:t>
+            </a:r>
+          </a:p>
+        </p:txBody>
+      </p:sp>
+      <p:sp>
+        <p:nvSpPr>
+          <p:cNvPr id="15" name="Rectangle 14"/>
           <p:cNvSpPr/>
           <p:nvPr/>
         </p:nvSpPr>
@@ -16881,8 +16893,63 @@
         </p:nvSpPr>
         <p:spPr>
           <a:xfrm>
-            <a:off x="201600" y="846000"/>
-            <a:ext cx="11807999" cy="684000"/>
+            <a:off x="201600" y="792000"/>
+            <a:ext cx="7200000" cy="270000"/>
+          </a:xfrm>
+          <a:prstGeom prst="rect">
+            <a:avLst/>
+          </a:prstGeom>
+          <a:noFill/>
+          <a:ln>
+            <a:noFill/>
+          </a:ln>
+          <a:effectLst/>
+        </p:spPr>
+        <p:style>
+          <a:lnRef idx="1">
+            <a:schemeClr val="accent1"/>
+          </a:lnRef>
+          <a:fillRef idx="3">
+            <a:schemeClr val="accent1"/>
+          </a:fillRef>
+          <a:effectRef idx="2">
+            <a:schemeClr val="accent1"/>
+          </a:effectRef>
+          <a:fontRef idx="minor">
+            <a:schemeClr val="lt1"/>
+          </a:fontRef>
+        </p:style>
+        <p:txBody>
+          <a:bodyPr rtlCol="0" anchor="t" lIns="125999" rIns="125999" tIns="54000" bIns="54000" wrap="square"/>
+          <a:lstStyle/>
+          <a:p>
+            <a:pPr algn="l">
+              <a:spcAft>
+                <a:spcPts val="0"/>
+              </a:spcAft>
+            </a:pPr>
+            <a:r>
+              <a:rPr sz="1300" b="1">
+                <a:solidFill>
+                  <a:srgbClr val="3B848E"/>
+                </a:solidFill>
+                <a:latin typeface="Calibri"/>
+              </a:rPr>
+              <a:t>METODOLOGIA</a:t>
+            </a:r>
+          </a:p>
+        </p:txBody>
+      </p:sp>
+      <p:sp>
+        <p:nvSpPr>
+          <p:cNvPr id="3" name="Rectangle 2"/>
+          <p:cNvSpPr/>
+          <p:nvPr/>
+        </p:nvSpPr>
+        <p:spPr>
+          <a:xfrm>
+            <a:off x="201600" y="1026000"/>
+            <a:ext cx="11807999" cy="612000"/>
           </a:xfrm>
           <a:prstGeom prst="rect">
             <a:avLst/>
@@ -16930,14 +16997,14 @@
       </p:sp>
       <p:sp>
         <p:nvSpPr>
-          <p:cNvPr id="3" name="Rectangle 2"/>
+          <p:cNvPr id="4" name="Rectangle 3"/>
           <p:cNvSpPr/>
           <p:nvPr/>
         </p:nvSpPr>
         <p:spPr>
           <a:xfrm>
             <a:off x="324000" y="1728000"/>
-            <a:ext cx="5688000" cy="2304000"/>
+            <a:ext cx="5688000" cy="2232000"/>
           </a:xfrm>
           <a:prstGeom prst="rect">
             <a:avLst/>
@@ -16974,7 +17041,7 @@
               </a:spcAft>
             </a:pPr>
             <a:r>
-              <a:rPr sz="4600" b="1">
+              <a:rPr sz="4800" b="1">
                 <a:solidFill>
                   <a:srgbClr val="3B848E"/>
                 </a:solidFill>
@@ -16990,27 +17057,27 @@
               </a:spcAft>
             </a:pPr>
             <a:r>
-              <a:rPr sz="1800" b="0">
+              <a:rPr sz="2000" b="0">
                 <a:solidFill>
                   <a:srgbClr val="1F2A33"/>
                 </a:solidFill>
                 <a:latin typeface="Calibri"/>
               </a:rPr>
-              <a:t>pessoas: a população oficial do Brasil, reproduzida rodando as mesmas rotinas nos 468.099 setores do país</a:t>
+              <a:t>pessoas: o código reproduz a população oficial do Brasil (468.099 setores)</a:t>
             </a:r>
           </a:p>
         </p:txBody>
       </p:sp>
       <p:sp>
         <p:nvSpPr>
-          <p:cNvPr id="4" name="Rectangle 3"/>
+          <p:cNvPr id="5" name="Rectangle 4"/>
           <p:cNvSpPr/>
           <p:nvPr/>
         </p:nvSpPr>
         <p:spPr>
           <a:xfrm>
             <a:off x="6155999" y="1728000"/>
-            <a:ext cx="5688000" cy="2304000"/>
+            <a:ext cx="5688000" cy="2232000"/>
           </a:xfrm>
           <a:prstGeom prst="rect">
             <a:avLst/>
@@ -17047,7 +17114,7 @@
               </a:spcAft>
             </a:pPr>
             <a:r>
-              <a:rPr sz="4600" b="1">
+              <a:rPr sz="4800" b="1">
                 <a:solidFill>
                   <a:srgbClr val="3B848E"/>
                 </a:solidFill>
@@ -17063,7 +17130,7 @@
               </a:spcAft>
             </a:pPr>
             <a:r>
-              <a:rPr sz="1800" b="0">
+              <a:rPr sz="2000" b="0">
                 <a:solidFill>
                   <a:srgbClr val="1F2A33"/>
                 </a:solidFill>
@@ -17076,14 +17143,14 @@
       </p:sp>
       <p:sp>
         <p:nvSpPr>
-          <p:cNvPr id="5" name="Rectangle 4"/>
+          <p:cNvPr id="6" name="Rectangle 5"/>
           <p:cNvSpPr/>
           <p:nvPr/>
         </p:nvSpPr>
         <p:spPr>
           <a:xfrm>
-            <a:off x="324000" y="4248000"/>
-            <a:ext cx="11520000" cy="1296000"/>
+            <a:off x="324000" y="4176000"/>
+            <a:ext cx="11520000" cy="1440000"/>
           </a:xfrm>
           <a:prstGeom prst="rect">
             <a:avLst/>
@@ -17120,7 +17187,7 @@
               </a:spcAft>
             </a:pPr>
             <a:r>
-              <a:rPr sz="1800" b="1">
+              <a:rPr sz="2000" b="1">
                 <a:solidFill>
                   <a:srgbClr val="D8634E"/>
                 </a:solidFill>
@@ -17142,7 +17209,7 @@
                 </a:solidFill>
                 <a:latin typeface="Calibri"/>
               </a:rPr>
-              <a:t>Um setor de favela em Belo Horizonte aparecia com renda média de </a:t>
+              <a:t>Um setor de favela em Belo Horizonte com renda média de </a:t>
             </a:r>
             <a:r>
               <a:rPr sz="2000" b="1">
@@ -17160,20 +17227,20 @@
                 </a:solidFill>
                 <a:latin typeface="Calibri"/>
               </a:rPr>
-              <a:t> por mês — incoerente com o próprio setor. Retirado da análise.</a:t>
+              <a:t> por mês — 55,7 vezes a mediana do município. Incoerente com o perfil do setor: retirado da análise descritiva.</a:t>
             </a:r>
           </a:p>
         </p:txBody>
       </p:sp>
       <p:sp>
         <p:nvSpPr>
-          <p:cNvPr id="6" name="Rectangle 5"/>
+          <p:cNvPr id="7" name="Rectangle 6"/>
           <p:cNvSpPr/>
           <p:nvPr/>
         </p:nvSpPr>
         <p:spPr>
           <a:xfrm>
-            <a:off x="324000" y="5688000"/>
+            <a:off x="324000" y="5724000"/>
             <a:ext cx="11520000" cy="503999"/>
           </a:xfrm>
           <a:prstGeom prst="rect">
@@ -17209,7 +17276,7 @@
               </a:spcAft>
             </a:pPr>
             <a:r>
-              <a:rPr sz="1400" b="0">
+              <a:rPr sz="1500" b="0">
                 <a:solidFill>
                   <a:srgbClr val="6B7780"/>
                 </a:solidFill>
@@ -17222,7 +17289,7 @@
       </p:sp>
       <p:sp>
         <p:nvSpPr>
-          <p:cNvPr id="7" name="Rectangle 6"/>
+          <p:cNvPr id="8" name="Rectangle 7"/>
           <p:cNvSpPr/>
           <p:nvPr/>
         </p:nvSpPr>
@@ -17301,8 +17368,63 @@
         </p:nvSpPr>
         <p:spPr>
           <a:xfrm>
-            <a:off x="201600" y="846000"/>
-            <a:ext cx="11807999" cy="684000"/>
+            <a:off x="201600" y="792000"/>
+            <a:ext cx="7200000" cy="270000"/>
+          </a:xfrm>
+          <a:prstGeom prst="rect">
+            <a:avLst/>
+          </a:prstGeom>
+          <a:noFill/>
+          <a:ln>
+            <a:noFill/>
+          </a:ln>
+          <a:effectLst/>
+        </p:spPr>
+        <p:style>
+          <a:lnRef idx="1">
+            <a:schemeClr val="accent1"/>
+          </a:lnRef>
+          <a:fillRef idx="3">
+            <a:schemeClr val="accent1"/>
+          </a:fillRef>
+          <a:effectRef idx="2">
+            <a:schemeClr val="accent1"/>
+          </a:effectRef>
+          <a:fontRef idx="minor">
+            <a:schemeClr val="lt1"/>
+          </a:fontRef>
+        </p:style>
+        <p:txBody>
+          <a:bodyPr rtlCol="0" anchor="t" lIns="125999" rIns="125999" tIns="54000" bIns="54000" wrap="square"/>
+          <a:lstStyle/>
+          <a:p>
+            <a:pPr algn="l">
+              <a:spcAft>
+                <a:spcPts val="0"/>
+              </a:spcAft>
+            </a:pPr>
+            <a:r>
+              <a:rPr sz="1300" b="1">
+                <a:solidFill>
+                  <a:srgbClr val="3B848E"/>
+                </a:solidFill>
+                <a:latin typeface="Calibri"/>
+              </a:rPr>
+              <a:t>RESULTADOS</a:t>
+            </a:r>
+          </a:p>
+        </p:txBody>
+      </p:sp>
+      <p:sp>
+        <p:nvSpPr>
+          <p:cNvPr id="3" name="Rectangle 2"/>
+          <p:cNvSpPr/>
+          <p:nvPr/>
+        </p:nvSpPr>
+        <p:spPr>
+          <a:xfrm>
+            <a:off x="201600" y="1026000"/>
+            <a:ext cx="11807999" cy="612000"/>
           </a:xfrm>
           <a:prstGeom prst="rect">
             <a:avLst/>
@@ -17343,14 +17465,14 @@
                 </a:solidFill>
                 <a:latin typeface="Calibri"/>
               </a:rPr>
-              <a:t>Em 74% dos setores, nenhum domicílio tem água inadequada</a:t>
+              <a:t>Em 74% dos setores, nenhum domicílio foi registrado com água inadequada</a:t>
             </a:r>
           </a:p>
         </p:txBody>
       </p:sp>
       <p:pic>
         <p:nvPicPr>
-          <p:cNvPr id="3" name="Picture 2" descr="oral_zeros_saneamento.png"/>
+          <p:cNvPr id="4" name="Picture 3" descr="oral_zeros_saneamento.png"/>
           <p:cNvPicPr>
             <a:picLocks noChangeAspect="1"/>
           </p:cNvPicPr>
@@ -17374,14 +17496,69 @@
       </p:pic>
       <p:sp>
         <p:nvSpPr>
-          <p:cNvPr id="4" name="Rectangle 3"/>
+          <p:cNvPr id="5" name="Rectangle 4"/>
           <p:cNvSpPr/>
           <p:nvPr/>
         </p:nvSpPr>
         <p:spPr>
           <a:xfrm>
-            <a:off x="8136000" y="1800000"/>
-            <a:ext cx="3744000" cy="1800000"/>
+            <a:off x="324000" y="5760000"/>
+            <a:ext cx="7416000" cy="432000"/>
+          </a:xfrm>
+          <a:prstGeom prst="rect">
+            <a:avLst/>
+          </a:prstGeom>
+          <a:noFill/>
+          <a:ln>
+            <a:noFill/>
+          </a:ln>
+          <a:effectLst/>
+        </p:spPr>
+        <p:style>
+          <a:lnRef idx="1">
+            <a:schemeClr val="accent1"/>
+          </a:lnRef>
+          <a:fillRef idx="3">
+            <a:schemeClr val="accent1"/>
+          </a:fillRef>
+          <a:effectRef idx="2">
+            <a:schemeClr val="accent1"/>
+          </a:effectRef>
+          <a:fontRef idx="minor">
+            <a:schemeClr val="lt1"/>
+          </a:fontRef>
+        </p:style>
+        <p:txBody>
+          <a:bodyPr rtlCol="0" anchor="t" lIns="125999" rIns="125999" tIns="54000" bIns="54000" wrap="square"/>
+          <a:lstStyle/>
+          <a:p>
+            <a:pPr algn="l">
+              <a:spcAft>
+                <a:spcPts val="600"/>
+              </a:spcAft>
+            </a:pPr>
+            <a:r>
+              <a:rPr sz="1400" b="0">
+                <a:solidFill>
+                  <a:srgbClr val="6B7780"/>
+                </a:solidFill>
+                <a:latin typeface="Calibri"/>
+              </a:rPr>
+              <a:t>Parte dos zeros vem de parcelas pequenas suprimidas pelo IBGE, que entram como zero.</a:t>
+            </a:r>
+          </a:p>
+        </p:txBody>
+      </p:sp>
+      <p:sp>
+        <p:nvSpPr>
+          <p:cNvPr id="6" name="Rectangle 5"/>
+          <p:cNvSpPr/>
+          <p:nvPr/>
+        </p:nvSpPr>
+        <p:spPr>
+          <a:xfrm>
+            <a:off x="8136000" y="1728000"/>
+            <a:ext cx="3744000" cy="1872000"/>
           </a:xfrm>
           <a:prstGeom prst="rect">
             <a:avLst/>
@@ -17414,11 +17591,11 @@
           <a:p>
             <a:pPr algn="l">
               <a:spcAft>
-                <a:spcPts val="800"/>
+                <a:spcPts val="600"/>
               </a:spcAft>
             </a:pPr>
             <a:r>
-              <a:rPr sz="1800" b="1">
+              <a:rPr sz="1900" b="1">
                 <a:solidFill>
                   <a:srgbClr val="3B848E"/>
                 </a:solidFill>
@@ -17430,7 +17607,7 @@
           <a:p>
             <a:pPr algn="l">
               <a:spcAft>
-                <a:spcPts val="800"/>
+                <a:spcPts val="600"/>
               </a:spcAft>
             </a:pPr>
             <a:r>
@@ -17446,7 +17623,7 @@
           <a:p>
             <a:pPr algn="l">
               <a:spcAft>
-                <a:spcPts val="800"/>
+                <a:spcPts val="600"/>
               </a:spcAft>
             </a:pPr>
             <a:r>
@@ -17456,21 +17633,21 @@
                 </a:solidFill>
                 <a:latin typeface="Calibri"/>
               </a:rPr>
-              <a:t>R$ 4.185,81 × R$ 2.572,39</a:t>
+              <a:t>poucos setores muito ricos puxam a média</a:t>
             </a:r>
           </a:p>
         </p:txBody>
       </p:sp>
       <p:sp>
         <p:nvSpPr>
-          <p:cNvPr id="5" name="Rectangle 4"/>
+          <p:cNvPr id="7" name="Rectangle 6"/>
           <p:cNvSpPr/>
           <p:nvPr/>
         </p:nvSpPr>
         <p:spPr>
           <a:xfrm>
             <a:off x="8136000" y="3816000"/>
-            <a:ext cx="3744000" cy="1655999"/>
+            <a:ext cx="3744000" cy="1944000"/>
           </a:xfrm>
           <a:prstGeom prst="rect">
             <a:avLst/>
@@ -17507,7 +17684,7 @@
               </a:spcAft>
             </a:pPr>
             <a:r>
-              <a:rPr sz="1800" b="1">
+              <a:rPr sz="1900" b="1">
                 <a:solidFill>
                   <a:srgbClr val="D8634E"/>
                 </a:solidFill>
@@ -17523,20 +17700,20 @@
               </a:spcAft>
             </a:pPr>
             <a:r>
-              <a:rPr sz="1700" b="0">
+              <a:rPr sz="1800" b="0">
                 <a:solidFill>
                   <a:srgbClr val="1F2A33"/>
                 </a:solidFill>
                 <a:latin typeface="Calibri"/>
               </a:rPr>
-              <a:t>Com tantos zeros, a média engana: numa escala de 0 a 1, quase todos os setores ficariam espremidos num canto.</a:t>
+              <a:t>O índice põe tudo na mesma régua, de 0 a 1. Com tantos zeros, quase todos os setores ficariam espremidos num canto dela.</a:t>
             </a:r>
           </a:p>
         </p:txBody>
       </p:sp>
       <p:sp>
         <p:nvSpPr>
-          <p:cNvPr id="6" name="Rectangle 5"/>
+          <p:cNvPr id="8" name="Rectangle 7"/>
           <p:cNvSpPr/>
           <p:nvPr/>
         </p:nvSpPr>
@@ -17615,8 +17792,63 @@
         </p:nvSpPr>
         <p:spPr>
           <a:xfrm>
-            <a:off x="201600" y="846000"/>
-            <a:ext cx="11807999" cy="684000"/>
+            <a:off x="201600" y="792000"/>
+            <a:ext cx="7200000" cy="270000"/>
+          </a:xfrm>
+          <a:prstGeom prst="rect">
+            <a:avLst/>
+          </a:prstGeom>
+          <a:noFill/>
+          <a:ln>
+            <a:noFill/>
+          </a:ln>
+          <a:effectLst/>
+        </p:spPr>
+        <p:style>
+          <a:lnRef idx="1">
+            <a:schemeClr val="accent1"/>
+          </a:lnRef>
+          <a:fillRef idx="3">
+            <a:schemeClr val="accent1"/>
+          </a:fillRef>
+          <a:effectRef idx="2">
+            <a:schemeClr val="accent1"/>
+          </a:effectRef>
+          <a:fontRef idx="minor">
+            <a:schemeClr val="lt1"/>
+          </a:fontRef>
+        </p:style>
+        <p:txBody>
+          <a:bodyPr rtlCol="0" anchor="t" lIns="125999" rIns="125999" tIns="54000" bIns="54000" wrap="square"/>
+          <a:lstStyle/>
+          <a:p>
+            <a:pPr algn="l">
+              <a:spcAft>
+                <a:spcPts val="0"/>
+              </a:spcAft>
+            </a:pPr>
+            <a:r>
+              <a:rPr sz="1300" b="1">
+                <a:solidFill>
+                  <a:srgbClr val="3B848E"/>
+                </a:solidFill>
+                <a:latin typeface="Calibri"/>
+              </a:rPr>
+              <a:t>RESULTADOS</a:t>
+            </a:r>
+          </a:p>
+        </p:txBody>
+      </p:sp>
+      <p:sp>
+        <p:nvSpPr>
+          <p:cNvPr id="3" name="Rectangle 2"/>
+          <p:cNvSpPr/>
+          <p:nvPr/>
+        </p:nvSpPr>
+        <p:spPr>
+          <a:xfrm>
+            <a:off x="201600" y="1026000"/>
+            <a:ext cx="11807999" cy="612000"/>
           </a:xfrm>
           <a:prstGeom prst="rect">
             <a:avLst/>
@@ -17664,7 +17896,7 @@
       </p:sp>
       <p:pic>
         <p:nvPicPr>
-          <p:cNvPr id="3" name="Picture 2" descr="oral_sigilo_analfabetismo.png"/>
+          <p:cNvPr id="4" name="Picture 3" descr="oral_sigilo_analfabetismo.png"/>
           <p:cNvPicPr>
             <a:picLocks noChangeAspect="1"/>
           </p:cNvPicPr>
@@ -17688,14 +17920,14 @@
       </p:pic>
       <p:sp>
         <p:nvSpPr>
-          <p:cNvPr id="4" name="Rectangle 3"/>
+          <p:cNvPr id="5" name="Rectangle 4"/>
           <p:cNvSpPr/>
           <p:nvPr/>
         </p:nvSpPr>
         <p:spPr>
           <a:xfrm>
-            <a:off x="6912000" y="1800000"/>
-            <a:ext cx="4968000" cy="1872000"/>
+            <a:off x="6912000" y="1692000"/>
+            <a:ext cx="4968000" cy="2015999"/>
           </a:xfrm>
           <a:prstGeom prst="rect">
             <a:avLst/>
@@ -17732,13 +17964,95 @@
               </a:spcAft>
             </a:pPr>
             <a:r>
-              <a:rPr sz="1800" b="1">
+              <a:rPr sz="4400" b="1">
                 <a:solidFill>
-                  <a:srgbClr val="3B848E"/>
+                  <a:srgbClr val="D8634E"/>
                 </a:solidFill>
                 <a:latin typeface="Calibri"/>
               </a:rPr>
-              <a:t>Sigilo</a:t>
+              <a:t>16%</a:t>
+            </a:r>
+            <a:r>
+              <a:rPr sz="2000" b="1">
+                <a:solidFill>
+                  <a:srgbClr val="1F2A33"/>
+                </a:solidFill>
+                <a:latin typeface="Calibri"/>
+              </a:rPr>
+              <a:t>  dos setores sem o dado de analfabetismo</a:t>
+            </a:r>
+          </a:p>
+          <a:p>
+            <a:pPr algn="l">
+              <a:spcAft>
+                <a:spcPts val="600"/>
+              </a:spcAft>
+            </a:pPr>
+            <a:r>
+              <a:rPr sz="1700" b="0">
+                <a:solidFill>
+                  <a:srgbClr val="1F2A33"/>
+                </a:solidFill>
+                <a:latin typeface="Calibri"/>
+              </a:rPr>
+              <a:t>Sigilo: quando há pouquíssima gente numa categoria, o IBGE esconde o número para ninguém ser identificado.</a:t>
+            </a:r>
+          </a:p>
+        </p:txBody>
+      </p:sp>
+      <p:sp>
+        <p:nvSpPr>
+          <p:cNvPr id="6" name="Rectangle 5"/>
+          <p:cNvSpPr/>
+          <p:nvPr/>
+        </p:nvSpPr>
+        <p:spPr>
+          <a:xfrm>
+            <a:off x="6912000" y="3888000"/>
+            <a:ext cx="4968000" cy="2088000"/>
+          </a:xfrm>
+          <a:prstGeom prst="rect">
+            <a:avLst/>
+          </a:prstGeom>
+          <a:noFill/>
+          <a:ln w="19050">
+            <a:solidFill>
+              <a:srgbClr val="D8634E"/>
+            </a:solidFill>
+          </a:ln>
+          <a:effectLst/>
+        </p:spPr>
+        <p:style>
+          <a:lnRef idx="1">
+            <a:schemeClr val="accent1"/>
+          </a:lnRef>
+          <a:fillRef idx="3">
+            <a:schemeClr val="accent1"/>
+          </a:fillRef>
+          <a:effectRef idx="2">
+            <a:schemeClr val="accent1"/>
+          </a:effectRef>
+          <a:fontRef idx="minor">
+            <a:schemeClr val="lt1"/>
+          </a:fontRef>
+        </p:style>
+        <p:txBody>
+          <a:bodyPr rtlCol="0" anchor="t" lIns="125999" rIns="125999" tIns="54000" bIns="54000" wrap="square"/>
+          <a:lstStyle/>
+          <a:p>
+            <a:pPr algn="l">
+              <a:spcAft>
+                <a:spcPts val="600"/>
+              </a:spcAft>
+            </a:pPr>
+            <a:r>
+              <a:rPr sz="1900" b="1">
+                <a:solidFill>
+                  <a:srgbClr val="D8634E"/>
+                </a:solidFill>
+                <a:latin typeface="Calibri"/>
+              </a:rPr>
+              <a:t>O que isso muda</a:t>
             </a:r>
           </a:p>
           <a:p>
@@ -17754,15 +18068,8 @@
                 </a:solidFill>
                 <a:latin typeface="Calibri"/>
               </a:rPr>
-              <a:t>Quando há pouquíssima gente numa categoria, o IBGE esconde o número para ninguém ser identificado.</a:t>
+              <a:t>Média observada </a:t>
             </a:r>
-          </a:p>
-          <a:p>
-            <a:pPr algn="l">
-              <a:spcAft>
-                <a:spcPts val="600"/>
-              </a:spcAft>
-            </a:pPr>
             <a:r>
               <a:rPr sz="1800" b="1">
                 <a:solidFill>
@@ -17770,64 +18077,52 @@
                 </a:solidFill>
                 <a:latin typeface="Calibri"/>
               </a:rPr>
-              <a:t>No analfabetismo: 16% dos setores</a:t>
+              <a:t>3,64%</a:t>
             </a:r>
-          </a:p>
-        </p:txBody>
-      </p:sp>
-      <p:sp>
-        <p:nvSpPr>
-          <p:cNvPr id="5" name="Rectangle 4"/>
-          <p:cNvSpPr/>
-          <p:nvPr/>
-        </p:nvSpPr>
-        <p:spPr>
-          <a:xfrm>
-            <a:off x="6912000" y="3888000"/>
-            <a:ext cx="4968000" cy="1944000"/>
-          </a:xfrm>
-          <a:prstGeom prst="rect">
-            <a:avLst/>
-          </a:prstGeom>
-          <a:noFill/>
-          <a:ln w="19050">
-            <a:solidFill>
-              <a:srgbClr val="D8634E"/>
-            </a:solidFill>
-          </a:ln>
-          <a:effectLst/>
-        </p:spPr>
-        <p:style>
-          <a:lnRef idx="1">
-            <a:schemeClr val="accent1"/>
-          </a:lnRef>
-          <a:fillRef idx="3">
-            <a:schemeClr val="accent1"/>
-          </a:fillRef>
-          <a:effectRef idx="2">
-            <a:schemeClr val="accent1"/>
-          </a:effectRef>
-          <a:fontRef idx="minor">
-            <a:schemeClr val="lt1"/>
-          </a:fontRef>
-        </p:style>
-        <p:txBody>
-          <a:bodyPr rtlCol="0" anchor="t" lIns="125999" rIns="125999" tIns="54000" bIns="54000" wrap="square"/>
-          <a:lstStyle/>
-          <a:p>
-            <a:pPr algn="l">
-              <a:spcAft>
-                <a:spcPts val="600"/>
-              </a:spcAft>
-            </a:pPr>
+            <a:r>
+              <a:rPr sz="1800" b="0">
+                <a:solidFill>
+                  <a:srgbClr val="1F2A33"/>
+                </a:solidFill>
+                <a:latin typeface="Calibri"/>
+              </a:rPr>
+              <a:t>; a real fica entre </a:t>
+            </a:r>
             <a:r>
               <a:rPr sz="1800" b="1">
                 <a:solidFill>
-                  <a:srgbClr val="D8634E"/>
+                  <a:srgbClr val="1F2A33"/>
                 </a:solidFill>
                 <a:latin typeface="Calibri"/>
               </a:rPr>
-              <a:t>O que isso muda</a:t>
+              <a:t>3,14%</a:t>
+            </a:r>
+            <a:r>
+              <a:rPr sz="1800" b="0">
+                <a:solidFill>
+                  <a:srgbClr val="1F2A33"/>
+                </a:solidFill>
+                <a:latin typeface="Calibri"/>
+              </a:rPr>
+              <a:t> e </a:t>
+            </a:r>
+            <a:r>
+              <a:rPr sz="1800" b="1">
+                <a:solidFill>
+                  <a:srgbClr val="1F2A33"/>
+                </a:solidFill>
+                <a:latin typeface="Calibri"/>
+              </a:rPr>
+              <a:t>3,64%</a:t>
+            </a:r>
+            <a:r>
+              <a:rPr sz="1800" b="0">
+                <a:solidFill>
+                  <a:srgbClr val="1F2A33"/>
+                </a:solidFill>
+                <a:latin typeface="Calibri"/>
+              </a:rPr>
+              <a:t>.</a:t>
             </a:r>
           </a:p>
           <a:p>
@@ -17843,14 +18138,14 @@
                 </a:solidFill>
                 <a:latin typeface="Calibri"/>
               </a:rPr>
-              <a:t>O IBGE esconde onde há poucos analfabetos — nos setores mais ricos. Descartá-los faria o analfabetismo parecer maior do que é.</a:t>
+              <a:t>O efeito é pequeno, mas o sigilo não é aleatório: precisa de tratamento próprio.</a:t>
             </a:r>
           </a:p>
         </p:txBody>
       </p:sp>
       <p:sp>
         <p:nvSpPr>
-          <p:cNvPr id="6" name="Rectangle 5"/>
+          <p:cNvPr id="7" name="Rectangle 6"/>
           <p:cNvSpPr/>
           <p:nvPr/>
         </p:nvSpPr>
